--- a/V1Formation_Lean_Maintenance_OCP.pptx
+++ b/V1Formation_Lean_Maintenance_OCP.pptx
@@ -4,6 +4,9 @@
   <p:sldMasterIdLst>
     <p:sldMasterId id="2147483648" r:id="rId1"/>
   </p:sldMasterIdLst>
+  <p:notesMasterIdLst>
+    <p:notesMasterId r:id="rId22"/>
+  </p:notesMasterIdLst>
   <p:sldIdLst>
     <p:sldId id="256" r:id="rId2"/>
     <p:sldId id="257" r:id="rId3"/>
@@ -26,10 +29,7 @@
     <p:sldId id="274" r:id="rId20"/>
     <p:sldId id="275" r:id="rId21"/>
   </p:sldIdLst>
-  <p:notesMasterIdLst>
-    <p:notesMasterId r:id="rId22"/>
-  </p:notesMasterIdLst>
-  <p:sldSz cx="9144000" cy="5143500"/>
+  <p:sldSz cx="9144000" cy="5143500" type="screen16x9"/>
   <p:notesSz cx="5143500" cy="9144000"/>
   <p:defaultTextStyle>
     <a:lvl1pPr marL="0" algn="l" defTabSz="914400" rtl="0" eaLnBrk="1" latinLnBrk="0" hangingPunct="1">
@@ -123,6 +123,11 @@
       </a:defRPr>
     </a:lvl9pPr>
   </p:defaultTextStyle>
+  <p:extLst>
+    <p:ext uri="{EFAFB233-063F-42B5-8137-9DF3F51BA10A}">
+      <p15:sldGuideLst xmlns:p15="http://schemas.microsoft.com/office/powerpoint/2012/main"/>
+    </p:ext>
+  </p:extLst>
 </p:presentation>
 </file>
 
@@ -148,234 +153,10 @@
           <a:chExt cx="0" cy="0"/>
         </a:xfrm>
       </p:grpSpPr>
-      <p:sp>
-        <p:nvSpPr>
-          <p:cNvPr id="2" name="Header Placeholder 1"/>
-          <p:cNvSpPr>
-            <a:spLocks noGrp="1"/>
-          </p:cNvSpPr>
-          <p:nvPr>
-            <p:ph type="hdr" sz="quarter"/>
-          </p:nvPr>
-        </p:nvSpPr>
-        <p:spPr>
-          <a:xfrm>
-            <a:off x="0" y="0"/>
-            <a:ext cx="2971800" cy="458788"/>
-          </a:xfrm>
-          <a:prstGeom prst="rect">
-            <a:avLst/>
-          </a:prstGeom>
-        </p:spPr>
-        <p:txBody>
-          <a:bodyPr vert="horz" lIns="91440" tIns="45720" rIns="91440" bIns="45720" rtlCol="0"/>
-          <a:lstStyle>
-            <a:lvl1pPr algn="l">
-              <a:defRPr sz="1200"/>
-            </a:lvl1pPr>
-          </a:lstStyle>
-          <a:p>
-            <a:endParaRPr lang="en-US"/>
-          </a:p>
-        </p:txBody>
-      </p:sp>
-      <p:sp>
-        <p:nvSpPr>
-          <p:cNvPr id="3" name="Date Placeholder 2"/>
-          <p:cNvSpPr>
-            <a:spLocks noGrp="1"/>
-          </p:cNvSpPr>
-          <p:nvPr>
-            <p:ph type="dt" idx="1"/>
-          </p:nvPr>
-        </p:nvSpPr>
-        <p:spPr>
-          <a:xfrm>
-            <a:off x="3884613" y="0"/>
-            <a:ext cx="2971800" cy="458788"/>
-          </a:xfrm>
-          <a:prstGeom prst="rect">
-            <a:avLst/>
-          </a:prstGeom>
-        </p:spPr>
-        <p:txBody>
-          <a:bodyPr vert="horz" lIns="91440" tIns="45720" rIns="91440" bIns="45720" rtlCol="0"/>
-          <a:lstStyle>
-            <a:lvl1pPr algn="r">
-              <a:defRPr sz="1200"/>
-            </a:lvl1pPr>
-          </a:lstStyle>
-          <a:p>
-            <a:fld id="{5282F153-3F37-0F45-9E97-73ACFA13230C}" type="datetimeFigureOut">
-              <a:rPr lang="en-US"/>
-              <a:t>7/23/19</a:t>
-            </a:fld>
-            <a:endParaRPr lang="en-US"/>
-          </a:p>
-        </p:txBody>
-      </p:sp>
-      <p:sp>
-        <p:nvSpPr>
-          <p:cNvPr id="4" name="Slide Image Placeholder 3"/>
-          <p:cNvSpPr>
-            <a:spLocks noGrp="1" noRot="1" noChangeAspect="1"/>
-          </p:cNvSpPr>
-          <p:nvPr>
-            <p:ph type="sldImg" idx="2"/>
-          </p:nvPr>
-        </p:nvSpPr>
-        <p:spPr>
-          <a:xfrm>
-            <a:off x="685800" y="1143000"/>
-            <a:ext cx="5486400" cy="3086100"/>
-          </a:xfrm>
-          <a:prstGeom prst="rect">
-            <a:avLst/>
-          </a:prstGeom>
-          <a:noFill/>
-          <a:ln w="12700">
-            <a:solidFill>
-              <a:prstClr val="black"/>
-            </a:solidFill>
-          </a:ln>
-        </p:spPr>
-        <p:txBody>
-          <a:bodyPr vert="horz" lIns="91440" tIns="45720" rIns="91440" bIns="45720" rtlCol="0" anchor="ctr"/>
-          <a:lstStyle/>
-          <a:p>
-            <a:endParaRPr lang="en-US"/>
-          </a:p>
-        </p:txBody>
-      </p:sp>
-      <p:sp>
-        <p:nvSpPr>
-          <p:cNvPr id="5" name="Notes Placeholder 4"/>
-          <p:cNvSpPr>
-            <a:spLocks noGrp="1"/>
-          </p:cNvSpPr>
-          <p:nvPr>
-            <p:ph type="body" sz="quarter" idx="3"/>
-          </p:nvPr>
-        </p:nvSpPr>
-        <p:spPr>
-          <a:xfrm>
-            <a:off x="685800" y="4400550"/>
-            <a:ext cx="5486400" cy="3600450"/>
-          </a:xfrm>
-          <a:prstGeom prst="rect">
-            <a:avLst/>
-          </a:prstGeom>
-        </p:spPr>
-        <p:txBody>
-          <a:bodyPr vert="horz" lIns="91440" tIns="45720" rIns="91440" bIns="45720" rtlCol="0"/>
-          <a:lstStyle/>
-          <a:p>
-            <a:pPr lvl="0"/>
-            <a:r>
-              <a:rPr lang="en-US"/>
-              <a:t>Click to edit Master text styles</a:t>
-            </a:r>
-          </a:p>
-          <a:p>
-            <a:pPr lvl="1"/>
-            <a:r>
-              <a:rPr lang="en-US"/>
-              <a:t>Second level</a:t>
-            </a:r>
-          </a:p>
-          <a:p>
-            <a:pPr lvl="2"/>
-            <a:r>
-              <a:rPr lang="en-US"/>
-              <a:t>Third level</a:t>
-            </a:r>
-          </a:p>
-          <a:p>
-            <a:pPr lvl="3"/>
-            <a:r>
-              <a:rPr lang="en-US"/>
-              <a:t>Fourth level</a:t>
-            </a:r>
-          </a:p>
-          <a:p>
-            <a:pPr lvl="4"/>
-            <a:r>
-              <a:rPr lang="en-US"/>
-              <a:t>Fifth level</a:t>
-            </a:r>
-          </a:p>
-        </p:txBody>
-      </p:sp>
-      <p:sp>
-        <p:nvSpPr>
-          <p:cNvPr id="6" name="Footer Placeholder 5"/>
-          <p:cNvSpPr>
-            <a:spLocks noGrp="1"/>
-          </p:cNvSpPr>
-          <p:nvPr>
-            <p:ph type="ftr" sz="quarter" idx="4"/>
-          </p:nvPr>
-        </p:nvSpPr>
-        <p:spPr>
-          <a:xfrm>
-            <a:off x="0" y="8685213"/>
-            <a:ext cx="2971800" cy="458787"/>
-          </a:xfrm>
-          <a:prstGeom prst="rect">
-            <a:avLst/>
-          </a:prstGeom>
-        </p:spPr>
-        <p:txBody>
-          <a:bodyPr vert="horz" lIns="91440" tIns="45720" rIns="91440" bIns="45720" rtlCol="0" anchor="b"/>
-          <a:lstStyle>
-            <a:lvl1pPr algn="l">
-              <a:defRPr sz="1200"/>
-            </a:lvl1pPr>
-          </a:lstStyle>
-          <a:p>
-            <a:endParaRPr lang="en-US"/>
-          </a:p>
-        </p:txBody>
-      </p:sp>
-      <p:sp>
-        <p:nvSpPr>
-          <p:cNvPr id="7" name="Slide Number Placeholder 6"/>
-          <p:cNvSpPr>
-            <a:spLocks noGrp="1"/>
-          </p:cNvSpPr>
-          <p:nvPr>
-            <p:ph type="sldNum" sz="quarter" idx="5"/>
-          </p:nvPr>
-        </p:nvSpPr>
-        <p:spPr>
-          <a:xfrm>
-            <a:off x="3884613" y="8685213"/>
-            <a:ext cx="2971800" cy="458787"/>
-          </a:xfrm>
-          <a:prstGeom prst="rect">
-            <a:avLst/>
-          </a:prstGeom>
-        </p:spPr>
-        <p:txBody>
-          <a:bodyPr vert="horz" lIns="91440" tIns="45720" rIns="91440" bIns="45720" rtlCol="0" anchor="b"/>
-          <a:lstStyle>
-            <a:lvl1pPr algn="r">
-              <a:defRPr sz="1200"/>
-            </a:lvl1pPr>
-          </a:lstStyle>
-          <a:p>
-            <a:fld id="{CE5E9CC1-C706-0F49-92D6-E571CC5EEA8F}" type="slidenum">
-              <a:rPr lang="en-US"/>
-              <a:t>‹#›</a:t>
-            </a:fld>
-            <a:endParaRPr lang="en-US"/>
-          </a:p>
-        </p:txBody>
-      </p:sp>
     </p:spTree>
     <p:extLst>
       <p:ext uri="{BB962C8B-B14F-4D97-AF65-F5344CB8AC3E}">
-        <p14:creationId xmlns:p14="http://schemas.microsoft.com/office/powerpoint/2010/main" val="1024086991"/>
+        <p14:creationId xmlns:p14="http://schemas.microsoft.com/office/powerpoint/2010/main" val="3289517153"/>
       </p:ext>
     </p:extLst>
   </p:cSld>
@@ -519,10 +300,6 @@
           <a:bodyPr/>
           <a:lstStyle/>
           <a:p>
-            <a:r>
-              <a:rPr lang="en-US" dirty="0"/>
-              <a:t/>
-            </a:r>
             <a:endParaRPr lang="en-US" dirty="0"/>
           </a:p>
         </p:txBody>
@@ -607,10 +384,6 @@
           <a:bodyPr/>
           <a:lstStyle/>
           <a:p>
-            <a:r>
-              <a:rPr lang="en-US" dirty="0"/>
-              <a:t/>
-            </a:r>
             <a:endParaRPr lang="en-US" dirty="0"/>
           </a:p>
         </p:txBody>
@@ -695,10 +468,6 @@
           <a:bodyPr/>
           <a:lstStyle/>
           <a:p>
-            <a:r>
-              <a:rPr lang="en-US" dirty="0"/>
-              <a:t/>
-            </a:r>
             <a:endParaRPr lang="en-US" dirty="0"/>
           </a:p>
         </p:txBody>
@@ -783,10 +552,6 @@
           <a:bodyPr/>
           <a:lstStyle/>
           <a:p>
-            <a:r>
-              <a:rPr lang="en-US" dirty="0"/>
-              <a:t/>
-            </a:r>
             <a:endParaRPr lang="en-US" dirty="0"/>
           </a:p>
         </p:txBody>
@@ -871,10 +636,6 @@
           <a:bodyPr/>
           <a:lstStyle/>
           <a:p>
-            <a:r>
-              <a:rPr lang="en-US" dirty="0"/>
-              <a:t/>
-            </a:r>
             <a:endParaRPr lang="en-US" dirty="0"/>
           </a:p>
         </p:txBody>
@@ -959,10 +720,6 @@
           <a:bodyPr/>
           <a:lstStyle/>
           <a:p>
-            <a:r>
-              <a:rPr lang="en-US" dirty="0"/>
-              <a:t/>
-            </a:r>
             <a:endParaRPr lang="en-US" dirty="0"/>
           </a:p>
         </p:txBody>
@@ -1047,10 +804,6 @@
           <a:bodyPr/>
           <a:lstStyle/>
           <a:p>
-            <a:r>
-              <a:rPr lang="en-US" dirty="0"/>
-              <a:t/>
-            </a:r>
             <a:endParaRPr lang="en-US" dirty="0"/>
           </a:p>
         </p:txBody>
@@ -1135,10 +888,6 @@
           <a:bodyPr/>
           <a:lstStyle/>
           <a:p>
-            <a:r>
-              <a:rPr lang="en-US" dirty="0"/>
-              <a:t/>
-            </a:r>
             <a:endParaRPr lang="en-US" dirty="0"/>
           </a:p>
         </p:txBody>
@@ -1223,10 +972,6 @@
           <a:bodyPr/>
           <a:lstStyle/>
           <a:p>
-            <a:r>
-              <a:rPr lang="en-US" dirty="0"/>
-              <a:t/>
-            </a:r>
             <a:endParaRPr lang="en-US" dirty="0"/>
           </a:p>
         </p:txBody>
@@ -1311,10 +1056,6 @@
           <a:bodyPr/>
           <a:lstStyle/>
           <a:p>
-            <a:r>
-              <a:rPr lang="en-US" dirty="0"/>
-              <a:t/>
-            </a:r>
             <a:endParaRPr lang="en-US" dirty="0"/>
           </a:p>
         </p:txBody>
@@ -1399,10 +1140,6 @@
           <a:bodyPr/>
           <a:lstStyle/>
           <a:p>
-            <a:r>
-              <a:rPr lang="en-US" dirty="0"/>
-              <a:t/>
-            </a:r>
             <a:endParaRPr lang="en-US" dirty="0"/>
           </a:p>
         </p:txBody>
@@ -1487,10 +1224,6 @@
           <a:bodyPr/>
           <a:lstStyle/>
           <a:p>
-            <a:r>
-              <a:rPr lang="en-US" dirty="0"/>
-              <a:t/>
-            </a:r>
             <a:endParaRPr lang="en-US" dirty="0"/>
           </a:p>
         </p:txBody>
@@ -1575,10 +1308,6 @@
           <a:bodyPr/>
           <a:lstStyle/>
           <a:p>
-            <a:r>
-              <a:rPr lang="en-US" dirty="0"/>
-              <a:t/>
-            </a:r>
             <a:endParaRPr lang="en-US" dirty="0"/>
           </a:p>
         </p:txBody>
@@ -1663,10 +1392,6 @@
           <a:bodyPr/>
           <a:lstStyle/>
           <a:p>
-            <a:r>
-              <a:rPr lang="en-US" dirty="0"/>
-              <a:t/>
-            </a:r>
             <a:endParaRPr lang="en-US" dirty="0"/>
           </a:p>
         </p:txBody>
@@ -1751,10 +1476,6 @@
           <a:bodyPr/>
           <a:lstStyle/>
           <a:p>
-            <a:r>
-              <a:rPr lang="en-US" dirty="0"/>
-              <a:t/>
-            </a:r>
             <a:endParaRPr lang="en-US" dirty="0"/>
           </a:p>
         </p:txBody>
@@ -1839,10 +1560,6 @@
           <a:bodyPr/>
           <a:lstStyle/>
           <a:p>
-            <a:r>
-              <a:rPr lang="en-US" dirty="0"/>
-              <a:t/>
-            </a:r>
             <a:endParaRPr lang="en-US" dirty="0"/>
           </a:p>
         </p:txBody>
@@ -1927,10 +1644,6 @@
           <a:bodyPr/>
           <a:lstStyle/>
           <a:p>
-            <a:r>
-              <a:rPr lang="en-US" dirty="0"/>
-              <a:t/>
-            </a:r>
             <a:endParaRPr lang="en-US" dirty="0"/>
           </a:p>
         </p:txBody>
@@ -2015,10 +1728,6 @@
           <a:bodyPr/>
           <a:lstStyle/>
           <a:p>
-            <a:r>
-              <a:rPr lang="en-US" dirty="0"/>
-              <a:t/>
-            </a:r>
             <a:endParaRPr lang="en-US" dirty="0"/>
           </a:p>
         </p:txBody>
@@ -2103,10 +1812,6 @@
           <a:bodyPr/>
           <a:lstStyle/>
           <a:p>
-            <a:r>
-              <a:rPr lang="en-US" dirty="0"/>
-              <a:t/>
-            </a:r>
             <a:endParaRPr lang="en-US" dirty="0"/>
           </a:p>
         </p:txBody>
@@ -2191,10 +1896,6 @@
           <a:bodyPr/>
           <a:lstStyle/>
           <a:p>
-            <a:r>
-              <a:rPr lang="en-US" dirty="0"/>
-              <a:t/>
-            </a:r>
             <a:endParaRPr lang="en-US" dirty="0"/>
           </a:p>
         </p:txBody>
@@ -2268,6 +1969,11 @@
 <file path=ppt/slideMasters/slideMaster1.xml><?xml version="1.0" encoding="utf-8"?>
 <p:sldMaster xmlns:a="http://schemas.openxmlformats.org/drawingml/2006/main" xmlns:r="http://schemas.openxmlformats.org/officeDocument/2006/relationships" xmlns:p="http://schemas.openxmlformats.org/presentationml/2006/main">
   <p:cSld>
+    <p:bg>
+      <p:bgRef idx="1001">
+        <a:schemeClr val="bg1"/>
+      </p:bgRef>
+    </p:bg>
     <p:spTree>
       <p:nvGrpSpPr>
         <p:cNvPr id="1" name=""/>
@@ -2550,6 +2256,7 @@
         <a:solidFill>
           <a:srgbClr val="004B87"/>
         </a:solidFill>
+        <a:effectLst/>
       </p:bgPr>
     </p:bg>
     <p:spTree>
@@ -2709,7 +2416,7 @@
           <a:bodyPr wrap="square" rtlCol="0" anchor="ctr"/>
           <a:lstStyle/>
           <a:p>
-            <a:pPr algn="ctr" indent="0" marL="0">
+            <a:pPr marL="0" indent="0" algn="ctr">
               <a:buNone/>
             </a:pPr>
             <a:r>
@@ -2745,7 +2452,7 @@
           <a:bodyPr wrap="square" rtlCol="0" anchor="ctr"/>
           <a:lstStyle/>
           <a:p>
-            <a:pPr indent="0" marL="0">
+            <a:pPr marL="0" indent="0">
               <a:buNone/>
             </a:pPr>
             <a:r>
@@ -2784,7 +2491,7 @@
           <a:bodyPr wrap="square" rtlCol="0" anchor="ctr"/>
           <a:lstStyle/>
           <a:p>
-            <a:pPr indent="0" marL="0">
+            <a:pPr marL="0" indent="0">
               <a:buNone/>
             </a:pPr>
             <a:r>
@@ -2823,7 +2530,7 @@
           <a:bodyPr wrap="square" rtlCol="0" anchor="ctr"/>
           <a:lstStyle/>
           <a:p>
-            <a:pPr indent="0" marL="0">
+            <a:pPr marL="0" indent="0">
               <a:buNone/>
             </a:pPr>
             <a:r>
@@ -2904,7 +2611,7 @@
           <a:bodyPr wrap="square" rtlCol="0" anchor="ctr"/>
           <a:lstStyle/>
           <a:p>
-            <a:pPr algn="ctr" indent="0" marL="0">
+            <a:pPr marL="0" indent="0" algn="ctr">
               <a:buNone/>
             </a:pPr>
             <a:r>
@@ -2940,7 +2647,7 @@
           <a:bodyPr wrap="square" rtlCol="0" anchor="ctr"/>
           <a:lstStyle/>
           <a:p>
-            <a:pPr algn="ctr" indent="0" marL="0">
+            <a:pPr marL="0" indent="0" algn="ctr">
               <a:buNone/>
             </a:pPr>
             <a:r>
@@ -2998,7 +2705,7 @@
           <a:bodyPr wrap="square" rtlCol="0" anchor="ctr"/>
           <a:lstStyle/>
           <a:p>
-            <a:pPr algn="ctr" indent="0" marL="0">
+            <a:pPr marL="0" indent="0" algn="ctr">
               <a:buNone/>
             </a:pPr>
             <a:r>
@@ -3034,7 +2741,7 @@
           <a:bodyPr wrap="square" rtlCol="0" anchor="ctr"/>
           <a:lstStyle/>
           <a:p>
-            <a:pPr algn="ctr" indent="0" marL="0">
+            <a:pPr marL="0" indent="0" algn="ctr">
               <a:buNone/>
             </a:pPr>
             <a:r>
@@ -3092,7 +2799,7 @@
           <a:bodyPr wrap="square" rtlCol="0" anchor="ctr"/>
           <a:lstStyle/>
           <a:p>
-            <a:pPr algn="ctr" indent="0" marL="0">
+            <a:pPr marL="0" indent="0" algn="ctr">
               <a:buNone/>
             </a:pPr>
             <a:r>
@@ -3128,7 +2835,7 @@
           <a:bodyPr wrap="square" rtlCol="0" anchor="ctr"/>
           <a:lstStyle/>
           <a:p>
-            <a:pPr algn="ctr" indent="0" marL="0">
+            <a:pPr marL="0" indent="0" algn="ctr">
               <a:buNone/>
             </a:pPr>
             <a:r>
@@ -3206,7 +2913,7 @@
           <a:bodyPr wrap="square" rtlCol="0" anchor="ctr"/>
           <a:lstStyle/>
           <a:p>
-            <a:pPr algn="ctr" indent="0" marL="0">
+            <a:pPr marL="0" indent="0" algn="ctr">
               <a:buNone/>
             </a:pPr>
             <a:r>
@@ -3242,7 +2949,7 @@
           <a:bodyPr wrap="square" rtlCol="0" anchor="ctr"/>
           <a:lstStyle/>
           <a:p>
-            <a:pPr indent="0" marL="0">
+            <a:pPr marL="0" indent="0">
               <a:buNone/>
             </a:pPr>
             <a:r>
@@ -3278,7 +2985,7 @@
           <a:bodyPr wrap="square" rtlCol="0" anchor="ctr"/>
           <a:lstStyle/>
           <a:p>
-            <a:pPr algn="r" indent="0" marL="0">
+            <a:pPr marL="0" indent="0" algn="r">
               <a:buNone/>
             </a:pPr>
             <a:r>
@@ -3359,11 +3066,11 @@
           <a:bodyPr wrap="square" rtlCol="0" anchor="ctr"/>
           <a:lstStyle/>
           <a:p>
-            <a:pPr indent="0" marL="0">
-              <a:buNone/>
-            </a:pPr>
-            <a:r>
-              <a:rPr lang="en-US" sz="800" b="1" spc="300" kern="0" dirty="0">
+            <a:pPr marL="0" indent="0">
+              <a:buNone/>
+            </a:pPr>
+            <a:r>
+              <a:rPr lang="en-US" sz="800" b="1" kern="0" spc="300" dirty="0">
                 <a:solidFill>
                   <a:srgbClr val="6B7280"/>
                 </a:solidFill>
@@ -3395,7 +3102,7 @@
           <a:bodyPr wrap="square" rtlCol="0" anchor="ctr"/>
           <a:lstStyle/>
           <a:p>
-            <a:pPr indent="0" marL="0">
+            <a:pPr marL="0" indent="0">
               <a:buNone/>
             </a:pPr>
             <a:r>
@@ -3434,7 +3141,7 @@
           <a:bodyPr wrap="square" rtlCol="0" anchor="ctr"/>
           <a:lstStyle/>
           <a:p>
-            <a:pPr indent="0" marL="0">
+            <a:pPr marL="0" indent="0">
               <a:buNone/>
             </a:pPr>
             <a:r>
@@ -3538,7 +3245,7 @@
           <a:bodyPr wrap="square" rtlCol="0" anchor="ctr"/>
           <a:lstStyle/>
           <a:p>
-            <a:pPr indent="0" marL="0">
+            <a:pPr marL="0" indent="0">
               <a:buNone/>
             </a:pPr>
             <a:r>
@@ -3574,7 +3281,7 @@
           <a:bodyPr wrap="square" rtlCol="0" anchor="ctr"/>
           <a:lstStyle/>
           <a:p>
-            <a:pPr indent="0" marL="0">
+            <a:pPr marL="0" indent="0">
               <a:buNone/>
             </a:pPr>
             <a:r>
@@ -3655,7 +3362,7 @@
           <a:bodyPr wrap="square" rtlCol="0" anchor="ctr"/>
           <a:lstStyle/>
           <a:p>
-            <a:pPr indent="0" marL="0">
+            <a:pPr marL="0" indent="0">
               <a:buNone/>
             </a:pPr>
             <a:r>
@@ -3691,7 +3398,7 @@
           <a:bodyPr wrap="square" rtlCol="0" anchor="ctr"/>
           <a:lstStyle/>
           <a:p>
-            <a:pPr indent="0" marL="0">
+            <a:pPr marL="0" indent="0">
               <a:buNone/>
             </a:pPr>
             <a:r>
@@ -3772,7 +3479,7 @@
           <a:bodyPr wrap="square" rtlCol="0" anchor="ctr"/>
           <a:lstStyle/>
           <a:p>
-            <a:pPr indent="0" marL="0">
+            <a:pPr marL="0" indent="0">
               <a:buNone/>
             </a:pPr>
             <a:r>
@@ -3808,7 +3515,7 @@
           <a:bodyPr wrap="square" rtlCol="0" anchor="ctr"/>
           <a:lstStyle/>
           <a:p>
-            <a:pPr indent="0" marL="0">
+            <a:pPr marL="0" indent="0">
               <a:buNone/>
             </a:pPr>
             <a:r>
@@ -3889,7 +3596,7 @@
           <a:bodyPr wrap="square" rtlCol="0" anchor="ctr"/>
           <a:lstStyle/>
           <a:p>
-            <a:pPr indent="0" marL="0">
+            <a:pPr marL="0" indent="0">
               <a:buNone/>
             </a:pPr>
             <a:r>
@@ -3925,7 +3632,7 @@
           <a:bodyPr wrap="square" rtlCol="0" anchor="ctr"/>
           <a:lstStyle/>
           <a:p>
-            <a:pPr indent="0" marL="0">
+            <a:pPr marL="0" indent="0">
               <a:buNone/>
             </a:pPr>
             <a:r>
@@ -4006,7 +3713,7 @@
           <a:bodyPr wrap="square" rtlCol="0" anchor="ctr"/>
           <a:lstStyle/>
           <a:p>
-            <a:pPr indent="0" marL="0">
+            <a:pPr marL="0" indent="0">
               <a:buNone/>
             </a:pPr>
             <a:r>
@@ -4042,7 +3749,7 @@
           <a:bodyPr wrap="square" rtlCol="0" anchor="ctr"/>
           <a:lstStyle/>
           <a:p>
-            <a:pPr indent="0" marL="0">
+            <a:pPr marL="0" indent="0">
               <a:buNone/>
             </a:pPr>
             <a:r>
@@ -4123,7 +3830,7 @@
           <a:bodyPr wrap="square" rtlCol="0" anchor="ctr"/>
           <a:lstStyle/>
           <a:p>
-            <a:pPr indent="0" marL="0">
+            <a:pPr marL="0" indent="0">
               <a:buNone/>
             </a:pPr>
             <a:r>
@@ -4159,7 +3866,7 @@
           <a:bodyPr wrap="square" rtlCol="0" anchor="ctr"/>
           <a:lstStyle/>
           <a:p>
-            <a:pPr indent="0" marL="0">
+            <a:pPr marL="0" indent="0">
               <a:buNone/>
             </a:pPr>
             <a:r>
@@ -4240,7 +3947,7 @@
           <a:bodyPr wrap="square" rtlCol="0" anchor="ctr"/>
           <a:lstStyle/>
           <a:p>
-            <a:pPr indent="0" marL="0">
+            <a:pPr marL="0" indent="0">
               <a:buNone/>
             </a:pPr>
             <a:r>
@@ -4276,7 +3983,7 @@
           <a:bodyPr wrap="square" rtlCol="0" anchor="ctr"/>
           <a:lstStyle/>
           <a:p>
-            <a:pPr indent="0" marL="0">
+            <a:pPr marL="0" indent="0">
               <a:buNone/>
             </a:pPr>
             <a:r>
@@ -4357,7 +4064,7 @@
           <a:bodyPr wrap="square" rtlCol="0" anchor="ctr"/>
           <a:lstStyle/>
           <a:p>
-            <a:pPr indent="0" marL="0">
+            <a:pPr marL="0" indent="0">
               <a:buNone/>
             </a:pPr>
             <a:r>
@@ -4393,7 +4100,7 @@
           <a:bodyPr wrap="square" rtlCol="0" anchor="ctr"/>
           <a:lstStyle/>
           <a:p>
-            <a:pPr indent="0" marL="0">
+            <a:pPr marL="0" indent="0">
               <a:buNone/>
             </a:pPr>
             <a:r>
@@ -4456,7 +4163,7 @@
           <a:bodyPr wrap="square" rtlCol="0" anchor="ctr"/>
           <a:lstStyle/>
           <a:p>
-            <a:pPr indent="0" marL="0">
+            <a:pPr marL="0" indent="0">
               <a:buNone/>
             </a:pPr>
             <a:r>
@@ -4492,7 +4199,7 @@
           <a:bodyPr wrap="square" rtlCol="0" anchor="ctr"/>
           <a:lstStyle/>
           <a:p>
-            <a:pPr indent="0" marL="0">
+            <a:pPr marL="0" indent="0">
               <a:buNone/>
             </a:pPr>
             <a:r>
@@ -4570,7 +4277,7 @@
           <a:bodyPr wrap="square" rtlCol="0" anchor="ctr"/>
           <a:lstStyle/>
           <a:p>
-            <a:pPr algn="ctr" indent="0" marL="0">
+            <a:pPr marL="0" indent="0" algn="ctr">
               <a:buNone/>
             </a:pPr>
             <a:r>
@@ -4606,7 +4313,7 @@
           <a:bodyPr wrap="square" rtlCol="0" anchor="ctr"/>
           <a:lstStyle/>
           <a:p>
-            <a:pPr indent="0" marL="0">
+            <a:pPr marL="0" indent="0">
               <a:buNone/>
             </a:pPr>
             <a:r>
@@ -4642,7 +4349,7 @@
           <a:bodyPr wrap="square" rtlCol="0" anchor="ctr"/>
           <a:lstStyle/>
           <a:p>
-            <a:pPr algn="r" indent="0" marL="0">
+            <a:pPr marL="0" indent="0" algn="r">
               <a:buNone/>
             </a:pPr>
             <a:r>
@@ -4723,11 +4430,11 @@
           <a:bodyPr wrap="square" rtlCol="0" anchor="ctr"/>
           <a:lstStyle/>
           <a:p>
-            <a:pPr indent="0" marL="0">
-              <a:buNone/>
-            </a:pPr>
-            <a:r>
-              <a:rPr lang="en-US" sz="800" b="1" spc="300" kern="0" dirty="0">
+            <a:pPr marL="0" indent="0">
+              <a:buNone/>
+            </a:pPr>
+            <a:r>
+              <a:rPr lang="en-US" sz="800" b="1" kern="0" spc="300" dirty="0">
                 <a:solidFill>
                   <a:srgbClr val="6B7280"/>
                 </a:solidFill>
@@ -4759,7 +4466,7 @@
           <a:bodyPr wrap="square" rtlCol="0" anchor="ctr"/>
           <a:lstStyle/>
           <a:p>
-            <a:pPr indent="0" marL="0">
+            <a:pPr marL="0" indent="0">
               <a:buNone/>
             </a:pPr>
             <a:r>
@@ -4798,7 +4505,7 @@
           <a:bodyPr wrap="square" rtlCol="0" anchor="ctr"/>
           <a:lstStyle/>
           <a:p>
-            <a:pPr indent="0" marL="0">
+            <a:pPr marL="0" indent="0">
               <a:buNone/>
             </a:pPr>
             <a:r>
@@ -4899,7 +4606,7 @@
           <a:bodyPr wrap="square" rtlCol="0" anchor="ctr"/>
           <a:lstStyle/>
           <a:p>
-            <a:pPr algn="ctr" indent="0" marL="0">
+            <a:pPr marL="0" indent="0" algn="ctr">
               <a:buNone/>
             </a:pPr>
             <a:r>
@@ -4935,7 +4642,7 @@
           <a:bodyPr wrap="square" rtlCol="0" anchor="ctr"/>
           <a:lstStyle/>
           <a:p>
-            <a:pPr indent="0" marL="0">
+            <a:pPr marL="0" indent="0">
               <a:buNone/>
             </a:pPr>
             <a:r>
@@ -4971,7 +4678,7 @@
           <a:bodyPr wrap="square" rtlCol="0" anchor="t"/>
           <a:lstStyle/>
           <a:p>
-            <a:pPr indent="0" marL="0">
+            <a:pPr marL="0" indent="0">
               <a:buNone/>
             </a:pPr>
             <a:r>
@@ -5049,7 +4756,7 @@
           <a:bodyPr wrap="square" rtlCol="0" anchor="ctr"/>
           <a:lstStyle/>
           <a:p>
-            <a:pPr algn="ctr" indent="0" marL="0">
+            <a:pPr marL="0" indent="0" algn="ctr">
               <a:buNone/>
             </a:pPr>
             <a:r>
@@ -5085,7 +4792,7 @@
           <a:bodyPr wrap="square" rtlCol="0" anchor="ctr"/>
           <a:lstStyle/>
           <a:p>
-            <a:pPr indent="0" marL="0">
+            <a:pPr marL="0" indent="0">
               <a:buNone/>
             </a:pPr>
             <a:r>
@@ -5121,7 +4828,7 @@
           <a:bodyPr wrap="square" rtlCol="0" anchor="t"/>
           <a:lstStyle/>
           <a:p>
-            <a:pPr indent="0" marL="0">
+            <a:pPr marL="0" indent="0">
               <a:buNone/>
             </a:pPr>
             <a:r>
@@ -5199,7 +4906,7 @@
           <a:bodyPr wrap="square" rtlCol="0" anchor="ctr"/>
           <a:lstStyle/>
           <a:p>
-            <a:pPr algn="ctr" indent="0" marL="0">
+            <a:pPr marL="0" indent="0" algn="ctr">
               <a:buNone/>
             </a:pPr>
             <a:r>
@@ -5235,7 +4942,7 @@
           <a:bodyPr wrap="square" rtlCol="0" anchor="ctr"/>
           <a:lstStyle/>
           <a:p>
-            <a:pPr indent="0" marL="0">
+            <a:pPr marL="0" indent="0">
               <a:buNone/>
             </a:pPr>
             <a:r>
@@ -5271,7 +4978,7 @@
           <a:bodyPr wrap="square" rtlCol="0" anchor="t"/>
           <a:lstStyle/>
           <a:p>
-            <a:pPr indent="0" marL="0">
+            <a:pPr marL="0" indent="0">
               <a:buNone/>
             </a:pPr>
             <a:r>
@@ -5349,7 +5056,7 @@
           <a:bodyPr wrap="square" rtlCol="0" anchor="ctr"/>
           <a:lstStyle/>
           <a:p>
-            <a:pPr algn="ctr" indent="0" marL="0">
+            <a:pPr marL="0" indent="0" algn="ctr">
               <a:buNone/>
             </a:pPr>
             <a:r>
@@ -5385,7 +5092,7 @@
           <a:bodyPr wrap="square" rtlCol="0" anchor="ctr"/>
           <a:lstStyle/>
           <a:p>
-            <a:pPr indent="0" marL="0">
+            <a:pPr marL="0" indent="0">
               <a:buNone/>
             </a:pPr>
             <a:r>
@@ -5421,7 +5128,7 @@
           <a:bodyPr wrap="square" rtlCol="0" anchor="t"/>
           <a:lstStyle/>
           <a:p>
-            <a:pPr indent="0" marL="0">
+            <a:pPr marL="0" indent="0">
               <a:buNone/>
             </a:pPr>
             <a:r>
@@ -5499,7 +5206,7 @@
           <a:bodyPr wrap="square" rtlCol="0" anchor="ctr"/>
           <a:lstStyle/>
           <a:p>
-            <a:pPr algn="ctr" indent="0" marL="0">
+            <a:pPr marL="0" indent="0" algn="ctr">
               <a:buNone/>
             </a:pPr>
             <a:r>
@@ -5535,7 +5242,7 @@
           <a:bodyPr wrap="square" rtlCol="0" anchor="ctr"/>
           <a:lstStyle/>
           <a:p>
-            <a:pPr indent="0" marL="0">
+            <a:pPr marL="0" indent="0">
               <a:buNone/>
             </a:pPr>
             <a:r>
@@ -5571,7 +5278,7 @@
           <a:bodyPr wrap="square" rtlCol="0" anchor="t"/>
           <a:lstStyle/>
           <a:p>
-            <a:pPr indent="0" marL="0">
+            <a:pPr marL="0" indent="0">
               <a:buNone/>
             </a:pPr>
             <a:r>
@@ -5649,7 +5356,7 @@
           <a:bodyPr wrap="square" rtlCol="0" anchor="ctr"/>
           <a:lstStyle/>
           <a:p>
-            <a:pPr algn="ctr" indent="0" marL="0">
+            <a:pPr marL="0" indent="0" algn="ctr">
               <a:buNone/>
             </a:pPr>
             <a:r>
@@ -5685,7 +5392,7 @@
           <a:bodyPr wrap="square" rtlCol="0" anchor="ctr"/>
           <a:lstStyle/>
           <a:p>
-            <a:pPr indent="0" marL="0">
+            <a:pPr marL="0" indent="0">
               <a:buNone/>
             </a:pPr>
             <a:r>
@@ -5721,7 +5428,7 @@
           <a:bodyPr wrap="square" rtlCol="0" anchor="t"/>
           <a:lstStyle/>
           <a:p>
-            <a:pPr indent="0" marL="0">
+            <a:pPr marL="0" indent="0">
               <a:buNone/>
             </a:pPr>
             <a:r>
@@ -5799,7 +5506,7 @@
           <a:bodyPr wrap="square" rtlCol="0" anchor="ctr"/>
           <a:lstStyle/>
           <a:p>
-            <a:pPr algn="ctr" indent="0" marL="0">
+            <a:pPr marL="0" indent="0" algn="ctr">
               <a:buNone/>
             </a:pPr>
             <a:r>
@@ -5835,7 +5542,7 @@
           <a:bodyPr wrap="square" rtlCol="0" anchor="ctr"/>
           <a:lstStyle/>
           <a:p>
-            <a:pPr indent="0" marL="0">
+            <a:pPr marL="0" indent="0">
               <a:buNone/>
             </a:pPr>
             <a:r>
@@ -5871,7 +5578,7 @@
           <a:bodyPr wrap="square" rtlCol="0" anchor="t"/>
           <a:lstStyle/>
           <a:p>
-            <a:pPr indent="0" marL="0">
+            <a:pPr marL="0" indent="0">
               <a:buNone/>
             </a:pPr>
             <a:r>
@@ -5949,7 +5656,7 @@
           <a:bodyPr wrap="square" rtlCol="0" anchor="ctr"/>
           <a:lstStyle/>
           <a:p>
-            <a:pPr algn="ctr" indent="0" marL="0">
+            <a:pPr marL="0" indent="0" algn="ctr">
               <a:buNone/>
             </a:pPr>
             <a:r>
@@ -5985,7 +5692,7 @@
           <a:bodyPr wrap="square" rtlCol="0" anchor="ctr"/>
           <a:lstStyle/>
           <a:p>
-            <a:pPr indent="0" marL="0">
+            <a:pPr marL="0" indent="0">
               <a:buNone/>
             </a:pPr>
             <a:r>
@@ -6021,7 +5728,7 @@
           <a:bodyPr wrap="square" rtlCol="0" anchor="ctr"/>
           <a:lstStyle/>
           <a:p>
-            <a:pPr algn="r" indent="0" marL="0">
+            <a:pPr marL="0" indent="0" algn="r">
               <a:buNone/>
             </a:pPr>
             <a:r>
@@ -6102,11 +5809,11 @@
           <a:bodyPr wrap="square" rtlCol="0" anchor="ctr"/>
           <a:lstStyle/>
           <a:p>
-            <a:pPr indent="0" marL="0">
-              <a:buNone/>
-            </a:pPr>
-            <a:r>
-              <a:rPr lang="en-US" sz="800" b="1" spc="300" kern="0" dirty="0">
+            <a:pPr marL="0" indent="0">
+              <a:buNone/>
+            </a:pPr>
+            <a:r>
+              <a:rPr lang="en-US" sz="800" b="1" kern="0" spc="300" dirty="0">
                 <a:solidFill>
                   <a:srgbClr val="6B7280"/>
                 </a:solidFill>
@@ -6138,7 +5845,7 @@
           <a:bodyPr wrap="square" rtlCol="0" anchor="ctr"/>
           <a:lstStyle/>
           <a:p>
-            <a:pPr indent="0" marL="0">
+            <a:pPr marL="0" indent="0">
               <a:buNone/>
             </a:pPr>
             <a:r>
@@ -6177,7 +5884,7 @@
           <a:bodyPr wrap="square" rtlCol="0" anchor="ctr"/>
           <a:lstStyle/>
           <a:p>
-            <a:pPr indent="0" marL="0">
+            <a:pPr marL="0" indent="0">
               <a:buNone/>
             </a:pPr>
             <a:r>
@@ -6263,7 +5970,7 @@
           <a:bodyPr wrap="square" rtlCol="0" anchor="ctr"/>
           <a:lstStyle/>
           <a:p>
-            <a:pPr indent="0" marL="0">
+            <a:pPr marL="0" indent="0">
               <a:buNone/>
             </a:pPr>
             <a:r>
@@ -6299,7 +6006,7 @@
           <a:bodyPr wrap="square" rtlCol="0" anchor="ctr"/>
           <a:lstStyle/>
           <a:p>
-            <a:pPr indent="0" marL="0">
+            <a:pPr marL="0" indent="0">
               <a:buNone/>
             </a:pPr>
             <a:r>
@@ -6360,7 +6067,7 @@
           <a:bodyPr wrap="square" rtlCol="0" anchor="ctr"/>
           <a:lstStyle/>
           <a:p>
-            <a:pPr algn="ctr" indent="0" marL="0">
+            <a:pPr marL="0" indent="0" algn="ctr">
               <a:buNone/>
             </a:pPr>
             <a:r>
@@ -6396,7 +6103,7 @@
           <a:bodyPr wrap="square" rtlCol="0" anchor="ctr"/>
           <a:lstStyle/>
           <a:p>
-            <a:pPr algn="ctr" indent="0" marL="0">
+            <a:pPr marL="0" indent="0" algn="ctr">
               <a:buNone/>
             </a:pPr>
             <a:r>
@@ -6452,7 +6159,7 @@
           <a:bodyPr wrap="square" rtlCol="0" anchor="ctr"/>
           <a:lstStyle/>
           <a:p>
-            <a:pPr indent="0" marL="0">
+            <a:pPr marL="0" indent="0">
               <a:buNone/>
             </a:pPr>
             <a:r>
@@ -6488,7 +6195,7 @@
           <a:bodyPr wrap="square" rtlCol="0" anchor="ctr"/>
           <a:lstStyle/>
           <a:p>
-            <a:pPr indent="0" marL="0">
+            <a:pPr marL="0" indent="0">
               <a:buNone/>
             </a:pPr>
             <a:r>
@@ -6549,7 +6256,7 @@
           <a:bodyPr wrap="square" rtlCol="0" anchor="ctr"/>
           <a:lstStyle/>
           <a:p>
-            <a:pPr algn="ctr" indent="0" marL="0">
+            <a:pPr marL="0" indent="0" algn="ctr">
               <a:buNone/>
             </a:pPr>
             <a:r>
@@ -6585,7 +6292,7 @@
           <a:bodyPr wrap="square" rtlCol="0" anchor="ctr"/>
           <a:lstStyle/>
           <a:p>
-            <a:pPr algn="ctr" indent="0" marL="0">
+            <a:pPr marL="0" indent="0" algn="ctr">
               <a:buNone/>
             </a:pPr>
             <a:r>
@@ -6641,7 +6348,7 @@
           <a:bodyPr wrap="square" rtlCol="0" anchor="ctr"/>
           <a:lstStyle/>
           <a:p>
-            <a:pPr indent="0" marL="0">
+            <a:pPr marL="0" indent="0">
               <a:buNone/>
             </a:pPr>
             <a:r>
@@ -6677,7 +6384,7 @@
           <a:bodyPr wrap="square" rtlCol="0" anchor="ctr"/>
           <a:lstStyle/>
           <a:p>
-            <a:pPr indent="0" marL="0">
+            <a:pPr marL="0" indent="0">
               <a:buNone/>
             </a:pPr>
             <a:r>
@@ -6738,7 +6445,7 @@
           <a:bodyPr wrap="square" rtlCol="0" anchor="ctr"/>
           <a:lstStyle/>
           <a:p>
-            <a:pPr algn="ctr" indent="0" marL="0">
+            <a:pPr marL="0" indent="0" algn="ctr">
               <a:buNone/>
             </a:pPr>
             <a:r>
@@ -6774,7 +6481,7 @@
           <a:bodyPr wrap="square" rtlCol="0" anchor="ctr"/>
           <a:lstStyle/>
           <a:p>
-            <a:pPr algn="ctr" indent="0" marL="0">
+            <a:pPr marL="0" indent="0" algn="ctr">
               <a:buNone/>
             </a:pPr>
             <a:r>
@@ -6830,7 +6537,7 @@
           <a:bodyPr wrap="square" rtlCol="0" anchor="ctr"/>
           <a:lstStyle/>
           <a:p>
-            <a:pPr indent="0" marL="0">
+            <a:pPr marL="0" indent="0">
               <a:buNone/>
             </a:pPr>
             <a:r>
@@ -6866,7 +6573,7 @@
           <a:bodyPr wrap="square" rtlCol="0" anchor="ctr"/>
           <a:lstStyle/>
           <a:p>
-            <a:pPr indent="0" marL="0">
+            <a:pPr marL="0" indent="0">
               <a:buNone/>
             </a:pPr>
             <a:r>
@@ -6927,7 +6634,7 @@
           <a:bodyPr wrap="square" rtlCol="0" anchor="ctr"/>
           <a:lstStyle/>
           <a:p>
-            <a:pPr algn="ctr" indent="0" marL="0">
+            <a:pPr marL="0" indent="0" algn="ctr">
               <a:buNone/>
             </a:pPr>
             <a:r>
@@ -6963,7 +6670,7 @@
           <a:bodyPr wrap="square" rtlCol="0" anchor="ctr"/>
           <a:lstStyle/>
           <a:p>
-            <a:pPr algn="ctr" indent="0" marL="0">
+            <a:pPr marL="0" indent="0" algn="ctr">
               <a:buNone/>
             </a:pPr>
             <a:r>
@@ -7019,7 +6726,7 @@
           <a:bodyPr wrap="square" rtlCol="0" anchor="ctr"/>
           <a:lstStyle/>
           <a:p>
-            <a:pPr indent="0" marL="0">
+            <a:pPr marL="0" indent="0">
               <a:buNone/>
             </a:pPr>
             <a:r>
@@ -7055,7 +6762,7 @@
           <a:bodyPr wrap="square" rtlCol="0" anchor="ctr"/>
           <a:lstStyle/>
           <a:p>
-            <a:pPr indent="0" marL="0">
+            <a:pPr marL="0" indent="0">
               <a:buNone/>
             </a:pPr>
             <a:r>
@@ -7116,7 +6823,7 @@
           <a:bodyPr wrap="square" rtlCol="0" anchor="ctr"/>
           <a:lstStyle/>
           <a:p>
-            <a:pPr algn="ctr" indent="0" marL="0">
+            <a:pPr marL="0" indent="0" algn="ctr">
               <a:buNone/>
             </a:pPr>
             <a:r>
@@ -7172,7 +6879,7 @@
           <a:bodyPr wrap="square" rtlCol="0" anchor="ctr"/>
           <a:lstStyle/>
           <a:p>
-            <a:pPr indent="0" marL="0">
+            <a:pPr marL="0" indent="0">
               <a:buNone/>
             </a:pPr>
             <a:r>
@@ -7208,7 +6915,7 @@
           <a:bodyPr wrap="square" rtlCol="0" anchor="ctr"/>
           <a:lstStyle/>
           <a:p>
-            <a:pPr indent="0" marL="0">
+            <a:pPr marL="0" indent="0">
               <a:buNone/>
             </a:pPr>
             <a:r>
@@ -7284,7 +6991,7 @@
           <a:bodyPr wrap="square" rtlCol="0" anchor="ctr"/>
           <a:lstStyle/>
           <a:p>
-            <a:pPr indent="0" marL="0">
+            <a:pPr marL="0" indent="0">
               <a:buNone/>
             </a:pPr>
             <a:r>
@@ -7298,7 +7005,7 @@
             <a:endParaRPr lang="en-US" sz="1000" dirty="0"/>
           </a:p>
           <a:p>
-            <a:pPr indent="0" marL="0">
+            <a:pPr marL="0" indent="0">
               <a:buNone/>
             </a:pPr>
             <a:r>
@@ -7376,7 +7083,7 @@
           <a:bodyPr wrap="square" rtlCol="0" anchor="ctr"/>
           <a:lstStyle/>
           <a:p>
-            <a:pPr algn="ctr" indent="0" marL="0">
+            <a:pPr marL="0" indent="0" algn="ctr">
               <a:buNone/>
             </a:pPr>
             <a:r>
@@ -7412,7 +7119,7 @@
           <a:bodyPr wrap="square" rtlCol="0" anchor="ctr"/>
           <a:lstStyle/>
           <a:p>
-            <a:pPr indent="0" marL="0">
+            <a:pPr marL="0" indent="0">
               <a:buNone/>
             </a:pPr>
             <a:r>
@@ -7448,7 +7155,7 @@
           <a:bodyPr wrap="square" rtlCol="0" anchor="ctr"/>
           <a:lstStyle/>
           <a:p>
-            <a:pPr algn="r" indent="0" marL="0">
+            <a:pPr marL="0" indent="0" algn="r">
               <a:buNone/>
             </a:pPr>
             <a:r>
@@ -7529,11 +7236,11 @@
           <a:bodyPr wrap="square" rtlCol="0" anchor="ctr"/>
           <a:lstStyle/>
           <a:p>
-            <a:pPr indent="0" marL="0">
-              <a:buNone/>
-            </a:pPr>
-            <a:r>
-              <a:rPr lang="en-US" sz="800" b="1" spc="300" kern="0" dirty="0">
+            <a:pPr marL="0" indent="0">
+              <a:buNone/>
+            </a:pPr>
+            <a:r>
+              <a:rPr lang="en-US" sz="800" b="1" kern="0" spc="300" dirty="0">
                 <a:solidFill>
                   <a:srgbClr val="6B7280"/>
                 </a:solidFill>
@@ -7565,7 +7272,7 @@
           <a:bodyPr wrap="square" rtlCol="0" anchor="ctr"/>
           <a:lstStyle/>
           <a:p>
-            <a:pPr indent="0" marL="0">
+            <a:pPr marL="0" indent="0">
               <a:buNone/>
             </a:pPr>
             <a:r>
@@ -7604,7 +7311,7 @@
           <a:bodyPr wrap="square" rtlCol="0" anchor="ctr"/>
           <a:lstStyle/>
           <a:p>
-            <a:pPr indent="0" marL="0">
+            <a:pPr marL="0" indent="0">
               <a:buNone/>
             </a:pPr>
             <a:r>
@@ -7683,7 +7390,7 @@
           <a:bodyPr wrap="square" rtlCol="0" anchor="ctr"/>
           <a:lstStyle/>
           <a:p>
-            <a:pPr indent="0" marL="0">
+            <a:pPr marL="0" indent="0">
               <a:buNone/>
             </a:pPr>
             <a:r>
@@ -7744,7 +7451,7 @@
           <a:bodyPr wrap="square" rtlCol="0" anchor="ctr"/>
           <a:lstStyle/>
           <a:p>
-            <a:pPr indent="0" marL="0">
+            <a:pPr marL="0" indent="0">
               <a:buNone/>
             </a:pPr>
             <a:r>
@@ -7780,7 +7487,7 @@
           <a:bodyPr wrap="square" rtlCol="0" anchor="ctr"/>
           <a:lstStyle/>
           <a:p>
-            <a:pPr indent="0" marL="0">
+            <a:pPr marL="0" indent="0">
               <a:buNone/>
             </a:pPr>
             <a:r>
@@ -7816,7 +7523,7 @@
           <a:bodyPr wrap="square" rtlCol="0" anchor="ctr"/>
           <a:lstStyle/>
           <a:p>
-            <a:pPr algn="ctr" indent="0" marL="0">
+            <a:pPr marL="0" indent="0" algn="ctr">
               <a:buNone/>
             </a:pPr>
             <a:r>
@@ -7852,7 +7559,7 @@
           <a:bodyPr wrap="square" rtlCol="0" anchor="ctr"/>
           <a:lstStyle/>
           <a:p>
-            <a:pPr indent="0" marL="0">
+            <a:pPr marL="0" indent="0">
               <a:buNone/>
             </a:pPr>
             <a:r>
@@ -7888,7 +7595,7 @@
           <a:bodyPr wrap="square" rtlCol="0" anchor="ctr"/>
           <a:lstStyle/>
           <a:p>
-            <a:pPr indent="0" marL="0">
+            <a:pPr marL="0" indent="0">
               <a:buNone/>
             </a:pPr>
             <a:r>
@@ -7949,7 +7656,7 @@
           <a:bodyPr wrap="square" rtlCol="0" anchor="ctr"/>
           <a:lstStyle/>
           <a:p>
-            <a:pPr indent="0" marL="0">
+            <a:pPr marL="0" indent="0">
               <a:buNone/>
             </a:pPr>
             <a:r>
@@ -7985,7 +7692,7 @@
           <a:bodyPr wrap="square" rtlCol="0" anchor="ctr"/>
           <a:lstStyle/>
           <a:p>
-            <a:pPr indent="0" marL="0">
+            <a:pPr marL="0" indent="0">
               <a:buNone/>
             </a:pPr>
             <a:r>
@@ -8048,7 +7755,7 @@
           <a:bodyPr wrap="square" rtlCol="0" anchor="ctr"/>
           <a:lstStyle/>
           <a:p>
-            <a:pPr indent="0" marL="0">
+            <a:pPr marL="0" indent="0">
               <a:buNone/>
             </a:pPr>
             <a:r>
@@ -8084,7 +7791,7 @@
           <a:bodyPr wrap="square" rtlCol="0" anchor="ctr"/>
           <a:lstStyle/>
           <a:p>
-            <a:pPr indent="0" marL="0">
+            <a:pPr marL="0" indent="0">
               <a:buNone/>
             </a:pPr>
             <a:r>
@@ -8098,7 +7805,7 @@
             <a:endParaRPr lang="en-US" sz="1000" dirty="0"/>
           </a:p>
           <a:p>
-            <a:pPr indent="0" marL="0">
+            <a:pPr marL="0" indent="0">
               <a:buNone/>
             </a:pPr>
             <a:r>
@@ -8112,7 +7819,7 @@
             <a:endParaRPr lang="en-US" sz="1000" dirty="0"/>
           </a:p>
           <a:p>
-            <a:pPr indent="0" marL="0">
+            <a:pPr marL="0" indent="0">
               <a:buNone/>
             </a:pPr>
             <a:r>
@@ -8126,7 +7833,7 @@
             <a:endParaRPr lang="en-US" sz="1000" dirty="0"/>
           </a:p>
           <a:p>
-            <a:pPr indent="0" marL="0">
+            <a:pPr marL="0" indent="0">
               <a:buNone/>
             </a:pPr>
             <a:r>
@@ -8140,7 +7847,7 @@
             <a:endParaRPr lang="en-US" sz="1000" dirty="0"/>
           </a:p>
           <a:p>
-            <a:pPr indent="0" marL="0">
+            <a:pPr marL="0" indent="0">
               <a:buNone/>
             </a:pPr>
             <a:r>
@@ -8218,7 +7925,7 @@
           <a:bodyPr wrap="square" rtlCol="0" anchor="ctr"/>
           <a:lstStyle/>
           <a:p>
-            <a:pPr algn="ctr" indent="0" marL="0">
+            <a:pPr marL="0" indent="0" algn="ctr">
               <a:buNone/>
             </a:pPr>
             <a:r>
@@ -8254,7 +7961,7 @@
           <a:bodyPr wrap="square" rtlCol="0" anchor="ctr"/>
           <a:lstStyle/>
           <a:p>
-            <a:pPr indent="0" marL="0">
+            <a:pPr marL="0" indent="0">
               <a:buNone/>
             </a:pPr>
             <a:r>
@@ -8290,7 +7997,7 @@
           <a:bodyPr wrap="square" rtlCol="0" anchor="ctr"/>
           <a:lstStyle/>
           <a:p>
-            <a:pPr algn="r" indent="0" marL="0">
+            <a:pPr marL="0" indent="0" algn="r">
               <a:buNone/>
             </a:pPr>
             <a:r>
@@ -8371,11 +8078,11 @@
           <a:bodyPr wrap="square" rtlCol="0" anchor="ctr"/>
           <a:lstStyle/>
           <a:p>
-            <a:pPr indent="0" marL="0">
-              <a:buNone/>
-            </a:pPr>
-            <a:r>
-              <a:rPr lang="en-US" sz="800" b="1" spc="300" kern="0" dirty="0">
+            <a:pPr marL="0" indent="0">
+              <a:buNone/>
+            </a:pPr>
+            <a:r>
+              <a:rPr lang="en-US" sz="800" b="1" kern="0" spc="300" dirty="0">
                 <a:solidFill>
                   <a:srgbClr val="6B7280"/>
                 </a:solidFill>
@@ -8407,7 +8114,7 @@
           <a:bodyPr wrap="square" rtlCol="0" anchor="ctr"/>
           <a:lstStyle/>
           <a:p>
-            <a:pPr indent="0" marL="0">
+            <a:pPr marL="0" indent="0">
               <a:buNone/>
             </a:pPr>
             <a:r>
@@ -8446,7 +8153,7 @@
           <a:bodyPr wrap="square" rtlCol="0" anchor="ctr"/>
           <a:lstStyle/>
           <a:p>
-            <a:pPr indent="0" marL="0">
+            <a:pPr marL="0" indent="0">
               <a:buNone/>
             </a:pPr>
             <a:r>
@@ -8530,7 +8237,7 @@
           <a:bodyPr wrap="square" rtlCol="0" anchor="ctr"/>
           <a:lstStyle/>
           <a:p>
-            <a:pPr indent="0" marL="0">
+            <a:pPr marL="0" indent="0">
               <a:buNone/>
             </a:pPr>
             <a:r>
@@ -8566,7 +8273,7 @@
           <a:bodyPr wrap="square" rtlCol="0" anchor="ctr"/>
           <a:lstStyle/>
           <a:p>
-            <a:pPr indent="0" marL="0">
+            <a:pPr marL="0" indent="0">
               <a:buNone/>
             </a:pPr>
             <a:r>
@@ -8602,7 +8309,7 @@
           <a:bodyPr wrap="square" rtlCol="0" anchor="t"/>
           <a:lstStyle/>
           <a:p>
-            <a:pPr indent="0" marL="0">
+            <a:pPr marL="0" indent="0">
               <a:buNone/>
             </a:pPr>
             <a:r>
@@ -8638,7 +8345,7 @@
           <a:bodyPr wrap="square" rtlCol="0" anchor="t"/>
           <a:lstStyle/>
           <a:p>
-            <a:pPr indent="0" marL="0">
+            <a:pPr marL="0" indent="0">
               <a:buNone/>
             </a:pPr>
             <a:r>
@@ -8699,7 +8406,7 @@
           <a:bodyPr wrap="square" rtlCol="0" anchor="ctr"/>
           <a:lstStyle/>
           <a:p>
-            <a:pPr indent="0" marL="0">
+            <a:pPr marL="0" indent="0">
               <a:buNone/>
             </a:pPr>
             <a:r>
@@ -8735,7 +8442,7 @@
           <a:bodyPr wrap="square" rtlCol="0" anchor="ctr"/>
           <a:lstStyle/>
           <a:p>
-            <a:pPr indent="0" marL="0">
+            <a:pPr marL="0" indent="0">
               <a:buNone/>
             </a:pPr>
             <a:r>
@@ -8771,7 +8478,7 @@
           <a:bodyPr wrap="square" rtlCol="0" anchor="t"/>
           <a:lstStyle/>
           <a:p>
-            <a:pPr indent="0" marL="0">
+            <a:pPr marL="0" indent="0">
               <a:buNone/>
             </a:pPr>
             <a:r>
@@ -8807,7 +8514,7 @@
           <a:bodyPr wrap="square" rtlCol="0" anchor="t"/>
           <a:lstStyle/>
           <a:p>
-            <a:pPr indent="0" marL="0">
+            <a:pPr marL="0" indent="0">
               <a:buNone/>
             </a:pPr>
             <a:r>
@@ -8868,7 +8575,7 @@
           <a:bodyPr wrap="square" rtlCol="0" anchor="ctr"/>
           <a:lstStyle/>
           <a:p>
-            <a:pPr indent="0" marL="0">
+            <a:pPr marL="0" indent="0">
               <a:buNone/>
             </a:pPr>
             <a:r>
@@ -8904,7 +8611,7 @@
           <a:bodyPr wrap="square" rtlCol="0" anchor="ctr"/>
           <a:lstStyle/>
           <a:p>
-            <a:pPr indent="0" marL="0">
+            <a:pPr marL="0" indent="0">
               <a:buNone/>
             </a:pPr>
             <a:r>
@@ -8940,7 +8647,7 @@
           <a:bodyPr wrap="square" rtlCol="0" anchor="t"/>
           <a:lstStyle/>
           <a:p>
-            <a:pPr indent="0" marL="0">
+            <a:pPr marL="0" indent="0">
               <a:buNone/>
             </a:pPr>
             <a:r>
@@ -8976,7 +8683,7 @@
           <a:bodyPr wrap="square" rtlCol="0" anchor="t"/>
           <a:lstStyle/>
           <a:p>
-            <a:pPr indent="0" marL="0">
+            <a:pPr marL="0" indent="0">
               <a:buNone/>
             </a:pPr>
             <a:r>
@@ -9037,7 +8744,7 @@
           <a:bodyPr wrap="square" rtlCol="0" anchor="ctr"/>
           <a:lstStyle/>
           <a:p>
-            <a:pPr indent="0" marL="0">
+            <a:pPr marL="0" indent="0">
               <a:buNone/>
             </a:pPr>
             <a:r>
@@ -9073,7 +8780,7 @@
           <a:bodyPr wrap="square" rtlCol="0" anchor="ctr"/>
           <a:lstStyle/>
           <a:p>
-            <a:pPr indent="0" marL="0">
+            <a:pPr marL="0" indent="0">
               <a:buNone/>
             </a:pPr>
             <a:r>
@@ -9109,7 +8816,7 @@
           <a:bodyPr wrap="square" rtlCol="0" anchor="t"/>
           <a:lstStyle/>
           <a:p>
-            <a:pPr indent="0" marL="0">
+            <a:pPr marL="0" indent="0">
               <a:buNone/>
             </a:pPr>
             <a:r>
@@ -9145,7 +8852,7 @@
           <a:bodyPr wrap="square" rtlCol="0" anchor="t"/>
           <a:lstStyle/>
           <a:p>
-            <a:pPr indent="0" marL="0">
+            <a:pPr marL="0" indent="0">
               <a:buNone/>
             </a:pPr>
             <a:r>
@@ -9208,7 +8915,7 @@
           <a:bodyPr wrap="square" rtlCol="0" anchor="ctr"/>
           <a:lstStyle/>
           <a:p>
-            <a:pPr indent="0" marL="0">
+            <a:pPr marL="0" indent="0">
               <a:buNone/>
             </a:pPr>
             <a:r>
@@ -9244,7 +8951,7 @@
           <a:bodyPr wrap="square" rtlCol="0" anchor="ctr"/>
           <a:lstStyle/>
           <a:p>
-            <a:pPr indent="0" marL="0">
+            <a:pPr marL="0" indent="0">
               <a:buNone/>
             </a:pPr>
             <a:r>
@@ -9322,7 +9029,7 @@
           <a:bodyPr wrap="square" rtlCol="0" anchor="ctr"/>
           <a:lstStyle/>
           <a:p>
-            <a:pPr algn="ctr" indent="0" marL="0">
+            <a:pPr marL="0" indent="0" algn="ctr">
               <a:buNone/>
             </a:pPr>
             <a:r>
@@ -9358,7 +9065,7 @@
           <a:bodyPr wrap="square" rtlCol="0" anchor="ctr"/>
           <a:lstStyle/>
           <a:p>
-            <a:pPr indent="0" marL="0">
+            <a:pPr marL="0" indent="0">
               <a:buNone/>
             </a:pPr>
             <a:r>
@@ -9394,7 +9101,7 @@
           <a:bodyPr wrap="square" rtlCol="0" anchor="ctr"/>
           <a:lstStyle/>
           <a:p>
-            <a:pPr algn="r" indent="0" marL="0">
+            <a:pPr marL="0" indent="0" algn="r">
               <a:buNone/>
             </a:pPr>
             <a:r>
@@ -9475,11 +9182,11 @@
           <a:bodyPr wrap="square" rtlCol="0" anchor="ctr"/>
           <a:lstStyle/>
           <a:p>
-            <a:pPr indent="0" marL="0">
-              <a:buNone/>
-            </a:pPr>
-            <a:r>
-              <a:rPr lang="en-US" sz="800" b="1" spc="300" kern="0" dirty="0">
+            <a:pPr marL="0" indent="0">
+              <a:buNone/>
+            </a:pPr>
+            <a:r>
+              <a:rPr lang="en-US" sz="800" b="1" kern="0" spc="300" dirty="0">
                 <a:solidFill>
                   <a:srgbClr val="6B7280"/>
                 </a:solidFill>
@@ -9511,7 +9218,7 @@
           <a:bodyPr wrap="square" rtlCol="0" anchor="ctr"/>
           <a:lstStyle/>
           <a:p>
-            <a:pPr indent="0" marL="0">
+            <a:pPr marL="0" indent="0">
               <a:buNone/>
             </a:pPr>
             <a:r>
@@ -9550,7 +9257,7 @@
           <a:bodyPr wrap="square" rtlCol="0" anchor="ctr"/>
           <a:lstStyle/>
           <a:p>
-            <a:pPr indent="0" marL="0">
+            <a:pPr marL="0" indent="0">
               <a:buNone/>
             </a:pPr>
             <a:r>
@@ -9654,7 +9361,7 @@
           <a:bodyPr wrap="square" rtlCol="0" anchor="ctr"/>
           <a:lstStyle/>
           <a:p>
-            <a:pPr indent="0" marL="0">
+            <a:pPr marL="0" indent="0">
               <a:buNone/>
             </a:pPr>
             <a:r>
@@ -9710,7 +9417,7 @@
           <a:bodyPr wrap="square" rtlCol="0" anchor="ctr"/>
           <a:lstStyle/>
           <a:p>
-            <a:pPr indent="0" marL="0">
+            <a:pPr marL="0" indent="0">
               <a:buNone/>
             </a:pPr>
             <a:r>
@@ -9746,7 +9453,7 @@
           <a:bodyPr wrap="square" rtlCol="0" anchor="ctr"/>
           <a:lstStyle/>
           <a:p>
-            <a:pPr indent="0" marL="0">
+            <a:pPr marL="0" indent="0">
               <a:buNone/>
             </a:pPr>
             <a:r>
@@ -9802,7 +9509,7 @@
           <a:bodyPr wrap="square" rtlCol="0" anchor="ctr"/>
           <a:lstStyle/>
           <a:p>
-            <a:pPr indent="0" marL="0">
+            <a:pPr marL="0" indent="0">
               <a:buNone/>
             </a:pPr>
             <a:r>
@@ -9838,7 +9545,7 @@
           <a:bodyPr wrap="square" rtlCol="0" anchor="ctr"/>
           <a:lstStyle/>
           <a:p>
-            <a:pPr indent="0" marL="0">
+            <a:pPr marL="0" indent="0">
               <a:buNone/>
             </a:pPr>
             <a:r>
@@ -9894,7 +9601,7 @@
           <a:bodyPr wrap="square" rtlCol="0" anchor="ctr"/>
           <a:lstStyle/>
           <a:p>
-            <a:pPr indent="0" marL="0">
+            <a:pPr marL="0" indent="0">
               <a:buNone/>
             </a:pPr>
             <a:r>
@@ -9930,7 +9637,7 @@
           <a:bodyPr wrap="square" rtlCol="0" anchor="ctr"/>
           <a:lstStyle/>
           <a:p>
-            <a:pPr indent="0" marL="0">
+            <a:pPr marL="0" indent="0">
               <a:buNone/>
             </a:pPr>
             <a:r>
@@ -9986,7 +9693,7 @@
           <a:bodyPr wrap="square" rtlCol="0" anchor="ctr"/>
           <a:lstStyle/>
           <a:p>
-            <a:pPr indent="0" marL="0">
+            <a:pPr marL="0" indent="0">
               <a:buNone/>
             </a:pPr>
             <a:r>
@@ -10022,7 +9729,7 @@
           <a:bodyPr wrap="square" rtlCol="0" anchor="ctr"/>
           <a:lstStyle/>
           <a:p>
-            <a:pPr indent="0" marL="0">
+            <a:pPr marL="0" indent="0">
               <a:buNone/>
             </a:pPr>
             <a:r>
@@ -10078,7 +9785,7 @@
           <a:bodyPr wrap="square" rtlCol="0" anchor="ctr"/>
           <a:lstStyle/>
           <a:p>
-            <a:pPr indent="0" marL="0">
+            <a:pPr marL="0" indent="0">
               <a:buNone/>
             </a:pPr>
             <a:r>
@@ -10114,7 +9821,7 @@
           <a:bodyPr wrap="square" rtlCol="0" anchor="ctr"/>
           <a:lstStyle/>
           <a:p>
-            <a:pPr indent="0" marL="0">
+            <a:pPr marL="0" indent="0">
               <a:buNone/>
             </a:pPr>
             <a:r>
@@ -10195,7 +9902,7 @@
           <a:bodyPr wrap="square" rtlCol="0" anchor="ctr"/>
           <a:lstStyle/>
           <a:p>
-            <a:pPr indent="0" marL="0">
+            <a:pPr marL="0" indent="0">
               <a:buNone/>
             </a:pPr>
             <a:r>
@@ -10231,7 +9938,7 @@
           <a:bodyPr wrap="square" rtlCol="0" anchor="ctr"/>
           <a:lstStyle/>
           <a:p>
-            <a:pPr indent="0" marL="0">
+            <a:pPr marL="0" indent="0">
               <a:buNone/>
             </a:pPr>
             <a:r>
@@ -10287,7 +9994,7 @@
           <a:bodyPr wrap="square" rtlCol="0" anchor="ctr"/>
           <a:lstStyle/>
           <a:p>
-            <a:pPr indent="0" marL="0">
+            <a:pPr marL="0" indent="0">
               <a:buNone/>
             </a:pPr>
             <a:r>
@@ -10323,7 +10030,7 @@
           <a:bodyPr wrap="square" rtlCol="0" anchor="ctr"/>
           <a:lstStyle/>
           <a:p>
-            <a:pPr indent="0" marL="0">
+            <a:pPr marL="0" indent="0">
               <a:buNone/>
             </a:pPr>
             <a:r>
@@ -10379,7 +10086,7 @@
           <a:bodyPr wrap="square" rtlCol="0" anchor="ctr"/>
           <a:lstStyle/>
           <a:p>
-            <a:pPr indent="0" marL="0">
+            <a:pPr marL="0" indent="0">
               <a:buNone/>
             </a:pPr>
             <a:r>
@@ -10415,7 +10122,7 @@
           <a:bodyPr wrap="square" rtlCol="0" anchor="ctr"/>
           <a:lstStyle/>
           <a:p>
-            <a:pPr indent="0" marL="0">
+            <a:pPr marL="0" indent="0">
               <a:buNone/>
             </a:pPr>
             <a:r>
@@ -10471,7 +10178,7 @@
           <a:bodyPr wrap="square" rtlCol="0" anchor="ctr"/>
           <a:lstStyle/>
           <a:p>
-            <a:pPr indent="0" marL="0">
+            <a:pPr marL="0" indent="0">
               <a:buNone/>
             </a:pPr>
             <a:r>
@@ -10507,7 +10214,7 @@
           <a:bodyPr wrap="square" rtlCol="0" anchor="ctr"/>
           <a:lstStyle/>
           <a:p>
-            <a:pPr indent="0" marL="0">
+            <a:pPr marL="0" indent="0">
               <a:buNone/>
             </a:pPr>
             <a:r>
@@ -10570,7 +10277,7 @@
           <a:bodyPr wrap="square" rtlCol="0" anchor="ctr"/>
           <a:lstStyle/>
           <a:p>
-            <a:pPr indent="0" marL="0">
+            <a:pPr marL="0" indent="0">
               <a:buNone/>
             </a:pPr>
             <a:r>
@@ -10606,7 +10313,7 @@
           <a:bodyPr wrap="square" rtlCol="0" anchor="ctr"/>
           <a:lstStyle/>
           <a:p>
-            <a:pPr indent="0" marL="0">
+            <a:pPr marL="0" indent="0">
               <a:buNone/>
             </a:pPr>
             <a:r>
@@ -10684,7 +10391,7 @@
           <a:bodyPr wrap="square" rtlCol="0" anchor="ctr"/>
           <a:lstStyle/>
           <a:p>
-            <a:pPr algn="ctr" indent="0" marL="0">
+            <a:pPr marL="0" indent="0" algn="ctr">
               <a:buNone/>
             </a:pPr>
             <a:r>
@@ -10720,7 +10427,7 @@
           <a:bodyPr wrap="square" rtlCol="0" anchor="ctr"/>
           <a:lstStyle/>
           <a:p>
-            <a:pPr indent="0" marL="0">
+            <a:pPr marL="0" indent="0">
               <a:buNone/>
             </a:pPr>
             <a:r>
@@ -10756,7 +10463,7 @@
           <a:bodyPr wrap="square" rtlCol="0" anchor="ctr"/>
           <a:lstStyle/>
           <a:p>
-            <a:pPr algn="r" indent="0" marL="0">
+            <a:pPr marL="0" indent="0" algn="r">
               <a:buNone/>
             </a:pPr>
             <a:r>
@@ -10837,11 +10544,11 @@
           <a:bodyPr wrap="square" rtlCol="0" anchor="ctr"/>
           <a:lstStyle/>
           <a:p>
-            <a:pPr indent="0" marL="0">
-              <a:buNone/>
-            </a:pPr>
-            <a:r>
-              <a:rPr lang="en-US" sz="800" b="1" spc="300" kern="0" dirty="0">
+            <a:pPr marL="0" indent="0">
+              <a:buNone/>
+            </a:pPr>
+            <a:r>
+              <a:rPr lang="en-US" sz="800" b="1" kern="0" spc="300" dirty="0">
                 <a:solidFill>
                   <a:srgbClr val="6B7280"/>
                 </a:solidFill>
@@ -10873,7 +10580,7 @@
           <a:bodyPr wrap="square" rtlCol="0" anchor="ctr"/>
           <a:lstStyle/>
           <a:p>
-            <a:pPr indent="0" marL="0">
+            <a:pPr marL="0" indent="0">
               <a:buNone/>
             </a:pPr>
             <a:r>
@@ -10912,7 +10619,7 @@
           <a:bodyPr wrap="square" rtlCol="0" anchor="ctr"/>
           <a:lstStyle/>
           <a:p>
-            <a:pPr indent="0" marL="0">
+            <a:pPr marL="0" indent="0">
               <a:buNone/>
             </a:pPr>
             <a:r>
@@ -11016,7 +10723,7 @@
           <a:bodyPr wrap="square" rtlCol="0" anchor="ctr"/>
           <a:lstStyle/>
           <a:p>
-            <a:pPr indent="0" marL="0">
+            <a:pPr marL="0" indent="0">
               <a:buNone/>
             </a:pPr>
             <a:r>
@@ -11072,7 +10779,7 @@
           <a:bodyPr wrap="square" rtlCol="0" anchor="ctr"/>
           <a:lstStyle/>
           <a:p>
-            <a:pPr algn="ctr" indent="0" marL="0">
+            <a:pPr marL="0" indent="0" algn="ctr">
               <a:buNone/>
             </a:pPr>
             <a:r>
@@ -11108,7 +10815,7 @@
           <a:bodyPr wrap="square" rtlCol="0" anchor="t"/>
           <a:lstStyle/>
           <a:p>
-            <a:pPr indent="0" marL="0">
+            <a:pPr marL="0" indent="0">
               <a:buNone/>
             </a:pPr>
             <a:r>
@@ -11164,7 +10871,7 @@
           <a:bodyPr wrap="square" rtlCol="0" anchor="ctr"/>
           <a:lstStyle/>
           <a:p>
-            <a:pPr algn="ctr" indent="0" marL="0">
+            <a:pPr marL="0" indent="0" algn="ctr">
               <a:buNone/>
             </a:pPr>
             <a:r>
@@ -11200,7 +10907,7 @@
           <a:bodyPr wrap="square" rtlCol="0" anchor="t"/>
           <a:lstStyle/>
           <a:p>
-            <a:pPr indent="0" marL="0">
+            <a:pPr marL="0" indent="0">
               <a:buNone/>
             </a:pPr>
             <a:r>
@@ -11256,7 +10963,7 @@
           <a:bodyPr wrap="square" rtlCol="0" anchor="ctr"/>
           <a:lstStyle/>
           <a:p>
-            <a:pPr algn="ctr" indent="0" marL="0">
+            <a:pPr marL="0" indent="0" algn="ctr">
               <a:buNone/>
             </a:pPr>
             <a:r>
@@ -11292,7 +10999,7 @@
           <a:bodyPr wrap="square" rtlCol="0" anchor="t"/>
           <a:lstStyle/>
           <a:p>
-            <a:pPr indent="0" marL="0">
+            <a:pPr marL="0" indent="0">
               <a:buNone/>
             </a:pPr>
             <a:r>
@@ -11348,7 +11055,7 @@
           <a:bodyPr wrap="square" rtlCol="0" anchor="ctr"/>
           <a:lstStyle/>
           <a:p>
-            <a:pPr algn="ctr" indent="0" marL="0">
+            <a:pPr marL="0" indent="0" algn="ctr">
               <a:buNone/>
             </a:pPr>
             <a:r>
@@ -11384,7 +11091,7 @@
           <a:bodyPr wrap="square" rtlCol="0" anchor="t"/>
           <a:lstStyle/>
           <a:p>
-            <a:pPr indent="0" marL="0">
+            <a:pPr marL="0" indent="0">
               <a:buNone/>
             </a:pPr>
             <a:r>
@@ -11440,7 +11147,7 @@
           <a:bodyPr wrap="square" rtlCol="0" anchor="ctr"/>
           <a:lstStyle/>
           <a:p>
-            <a:pPr algn="ctr" indent="0" marL="0">
+            <a:pPr marL="0" indent="0" algn="ctr">
               <a:buNone/>
             </a:pPr>
             <a:r>
@@ -11476,7 +11183,7 @@
           <a:bodyPr wrap="square" rtlCol="0" anchor="t"/>
           <a:lstStyle/>
           <a:p>
-            <a:pPr indent="0" marL="0">
+            <a:pPr marL="0" indent="0">
               <a:buNone/>
             </a:pPr>
             <a:r>
@@ -11552,7 +11259,7 @@
           <a:bodyPr wrap="square" rtlCol="0" anchor="ctr"/>
           <a:lstStyle/>
           <a:p>
-            <a:pPr indent="0" marL="0">
+            <a:pPr marL="0" indent="0">
               <a:buNone/>
             </a:pPr>
             <a:r>
@@ -11608,7 +11315,7 @@
           <a:bodyPr wrap="square" rtlCol="0" anchor="ctr"/>
           <a:lstStyle/>
           <a:p>
-            <a:pPr indent="0" marL="0">
+            <a:pPr marL="0" indent="0">
               <a:buNone/>
             </a:pPr>
             <a:r>
@@ -11664,7 +11371,7 @@
           <a:bodyPr wrap="square" rtlCol="0" anchor="ctr"/>
           <a:lstStyle/>
           <a:p>
-            <a:pPr indent="0" marL="0">
+            <a:pPr marL="0" indent="0">
               <a:buNone/>
             </a:pPr>
             <a:r>
@@ -11720,7 +11427,7 @@
           <a:bodyPr wrap="square" rtlCol="0" anchor="ctr"/>
           <a:lstStyle/>
           <a:p>
-            <a:pPr indent="0" marL="0">
+            <a:pPr marL="0" indent="0">
               <a:buNone/>
             </a:pPr>
             <a:r>
@@ -11776,7 +11483,7 @@
           <a:bodyPr wrap="square" rtlCol="0" anchor="ctr"/>
           <a:lstStyle/>
           <a:p>
-            <a:pPr indent="0" marL="0">
+            <a:pPr marL="0" indent="0">
               <a:buNone/>
             </a:pPr>
             <a:r>
@@ -11832,7 +11539,7 @@
           <a:bodyPr wrap="square" rtlCol="0" anchor="ctr"/>
           <a:lstStyle/>
           <a:p>
-            <a:pPr indent="0" marL="0">
+            <a:pPr marL="0" indent="0">
               <a:buNone/>
             </a:pPr>
             <a:r>
@@ -11895,7 +11602,7 @@
           <a:bodyPr wrap="square" rtlCol="0" anchor="ctr"/>
           <a:lstStyle/>
           <a:p>
-            <a:pPr indent="0" marL="0">
+            <a:pPr marL="0" indent="0">
               <a:buNone/>
             </a:pPr>
             <a:r>
@@ -11931,7 +11638,7 @@
           <a:bodyPr wrap="square" rtlCol="0" anchor="ctr"/>
           <a:lstStyle/>
           <a:p>
-            <a:pPr indent="0" marL="0">
+            <a:pPr marL="0" indent="0">
               <a:buNone/>
             </a:pPr>
             <a:r>
@@ -11954,7 +11661,7 @@
         </p:nvSpPr>
         <p:spPr>
           <a:xfrm>
-            <a:off x="0" y="4846320"/>
+            <a:off x="0" y="4499190"/>
             <a:ext cx="9144000" cy="640080"/>
           </a:xfrm>
           <a:prstGeom prst="rect">
@@ -11974,7 +11681,7 @@
         </p:nvSpPr>
         <p:spPr>
           <a:xfrm>
-            <a:off x="182880" y="4937760"/>
+            <a:off x="182880" y="4590630"/>
             <a:ext cx="731520" cy="457200"/>
           </a:xfrm>
           <a:prstGeom prst="roundRect">
@@ -11996,7 +11703,7 @@
         </p:nvSpPr>
         <p:spPr>
           <a:xfrm>
-            <a:off x="182880" y="4983480"/>
+            <a:off x="182880" y="4636350"/>
             <a:ext cx="731520" cy="365760"/>
           </a:xfrm>
           <a:prstGeom prst="rect">
@@ -12009,7 +11716,7 @@
           <a:bodyPr wrap="square" rtlCol="0" anchor="ctr"/>
           <a:lstStyle/>
           <a:p>
-            <a:pPr algn="ctr" indent="0" marL="0">
+            <a:pPr marL="0" indent="0" algn="ctr">
               <a:buNone/>
             </a:pPr>
             <a:r>
@@ -12032,7 +11739,7 @@
         </p:nvSpPr>
         <p:spPr>
           <a:xfrm>
-            <a:off x="1005840" y="5047488"/>
+            <a:off x="1005840" y="4700358"/>
             <a:ext cx="2286000" cy="274320"/>
           </a:xfrm>
           <a:prstGeom prst="rect">
@@ -12045,7 +11752,7 @@
           <a:bodyPr wrap="square" rtlCol="0" anchor="ctr"/>
           <a:lstStyle/>
           <a:p>
-            <a:pPr indent="0" marL="0">
+            <a:pPr marL="0" indent="0">
               <a:buNone/>
             </a:pPr>
             <a:r>
@@ -12068,7 +11775,7 @@
         </p:nvSpPr>
         <p:spPr>
           <a:xfrm>
-            <a:off x="8412480" y="5047488"/>
+            <a:off x="8412480" y="4700358"/>
             <a:ext cx="548640" cy="274320"/>
           </a:xfrm>
           <a:prstGeom prst="rect">
@@ -12081,7 +11788,7 @@
           <a:bodyPr wrap="square" rtlCol="0" anchor="ctr"/>
           <a:lstStyle/>
           <a:p>
-            <a:pPr algn="r" indent="0" marL="0">
+            <a:pPr marL="0" indent="0" algn="r">
               <a:buNone/>
             </a:pPr>
             <a:r>
@@ -12104,7 +11811,7 @@
         </p:nvSpPr>
         <p:spPr>
           <a:xfrm>
-            <a:off x="0" y="4828032"/>
+            <a:off x="0" y="4480902"/>
             <a:ext cx="9144000" cy="18288"/>
           </a:xfrm>
           <a:prstGeom prst="rect">
@@ -12162,11 +11869,11 @@
           <a:bodyPr wrap="square" rtlCol="0" anchor="ctr"/>
           <a:lstStyle/>
           <a:p>
-            <a:pPr indent="0" marL="0">
-              <a:buNone/>
-            </a:pPr>
-            <a:r>
-              <a:rPr lang="en-US" sz="800" b="1" spc="300" kern="0" dirty="0">
+            <a:pPr marL="0" indent="0">
+              <a:buNone/>
+            </a:pPr>
+            <a:r>
+              <a:rPr lang="en-US" sz="800" b="1" kern="0" spc="300" dirty="0">
                 <a:solidFill>
                   <a:srgbClr val="6B7280"/>
                 </a:solidFill>
@@ -12198,7 +11905,7 @@
           <a:bodyPr wrap="square" rtlCol="0" anchor="ctr"/>
           <a:lstStyle/>
           <a:p>
-            <a:pPr indent="0" marL="0">
+            <a:pPr marL="0" indent="0">
               <a:buNone/>
             </a:pPr>
             <a:r>
@@ -12237,7 +11944,7 @@
           <a:bodyPr wrap="square" rtlCol="0" anchor="ctr"/>
           <a:lstStyle/>
           <a:p>
-            <a:pPr indent="0" marL="0">
+            <a:pPr marL="0" indent="0">
               <a:buNone/>
             </a:pPr>
             <a:r>
@@ -12296,11 +12003,11 @@
           <a:bodyPr wrap="square" rtlCol="0" anchor="ctr"/>
           <a:lstStyle/>
           <a:p>
-            <a:pPr indent="0" marL="0">
-              <a:buNone/>
-            </a:pPr>
-            <a:r>
-              <a:rPr lang="en-US" sz="800" b="1" spc="200" kern="0" dirty="0">
+            <a:pPr marL="0" indent="0">
+              <a:buNone/>
+            </a:pPr>
+            <a:r>
+              <a:rPr lang="en-US" sz="800" b="1" kern="0" spc="200" dirty="0">
                 <a:solidFill>
                   <a:srgbClr val="6B7280"/>
                 </a:solidFill>
@@ -12377,7 +12084,7 @@
           <a:bodyPr wrap="square" rtlCol="0" anchor="ctr"/>
           <a:lstStyle/>
           <a:p>
-            <a:pPr algn="ctr" indent="0" marL="0">
+            <a:pPr marL="0" indent="0" algn="ctr">
               <a:buNone/>
             </a:pPr>
             <a:r>
@@ -12413,7 +12120,7 @@
           <a:bodyPr wrap="square" rtlCol="0" anchor="ctr"/>
           <a:lstStyle/>
           <a:p>
-            <a:pPr indent="0" marL="0">
+            <a:pPr marL="0" indent="0">
               <a:buNone/>
             </a:pPr>
             <a:r>
@@ -12449,7 +12156,7 @@
           <a:bodyPr wrap="square" rtlCol="0" anchor="t"/>
           <a:lstStyle/>
           <a:p>
-            <a:pPr indent="0" marL="0">
+            <a:pPr marL="0" indent="0">
               <a:buNone/>
             </a:pPr>
             <a:r>
@@ -12505,7 +12212,7 @@
           <a:bodyPr wrap="square" rtlCol="0" anchor="ctr"/>
           <a:lstStyle/>
           <a:p>
-            <a:pPr algn="ctr" indent="0" marL="0">
+            <a:pPr marL="0" indent="0" algn="ctr">
               <a:buNone/>
             </a:pPr>
             <a:r>
@@ -12586,7 +12293,7 @@
           <a:bodyPr wrap="square" rtlCol="0" anchor="ctr"/>
           <a:lstStyle/>
           <a:p>
-            <a:pPr algn="ctr" indent="0" marL="0">
+            <a:pPr marL="0" indent="0" algn="ctr">
               <a:buNone/>
             </a:pPr>
             <a:r>
@@ -12622,7 +12329,7 @@
           <a:bodyPr wrap="square" rtlCol="0" anchor="ctr"/>
           <a:lstStyle/>
           <a:p>
-            <a:pPr indent="0" marL="0">
+            <a:pPr marL="0" indent="0">
               <a:buNone/>
             </a:pPr>
             <a:r>
@@ -12658,7 +12365,7 @@
           <a:bodyPr wrap="square" rtlCol="0" anchor="t"/>
           <a:lstStyle/>
           <a:p>
-            <a:pPr indent="0" marL="0">
+            <a:pPr marL="0" indent="0">
               <a:buNone/>
             </a:pPr>
             <a:r>
@@ -12714,7 +12421,7 @@
           <a:bodyPr wrap="square" rtlCol="0" anchor="ctr"/>
           <a:lstStyle/>
           <a:p>
-            <a:pPr algn="ctr" indent="0" marL="0">
+            <a:pPr marL="0" indent="0" algn="ctr">
               <a:buNone/>
             </a:pPr>
             <a:r>
@@ -12795,7 +12502,7 @@
           <a:bodyPr wrap="square" rtlCol="0" anchor="ctr"/>
           <a:lstStyle/>
           <a:p>
-            <a:pPr algn="ctr" indent="0" marL="0">
+            <a:pPr marL="0" indent="0" algn="ctr">
               <a:buNone/>
             </a:pPr>
             <a:r>
@@ -12831,7 +12538,7 @@
           <a:bodyPr wrap="square" rtlCol="0" anchor="ctr"/>
           <a:lstStyle/>
           <a:p>
-            <a:pPr indent="0" marL="0">
+            <a:pPr marL="0" indent="0">
               <a:buNone/>
             </a:pPr>
             <a:r>
@@ -12867,7 +12574,7 @@
           <a:bodyPr wrap="square" rtlCol="0" anchor="t"/>
           <a:lstStyle/>
           <a:p>
-            <a:pPr indent="0" marL="0">
+            <a:pPr marL="0" indent="0">
               <a:buNone/>
             </a:pPr>
             <a:r>
@@ -12923,7 +12630,7 @@
           <a:bodyPr wrap="square" rtlCol="0" anchor="ctr"/>
           <a:lstStyle/>
           <a:p>
-            <a:pPr algn="ctr" indent="0" marL="0">
+            <a:pPr marL="0" indent="0" algn="ctr">
               <a:buNone/>
             </a:pPr>
             <a:r>
@@ -13004,7 +12711,7 @@
           <a:bodyPr wrap="square" rtlCol="0" anchor="ctr"/>
           <a:lstStyle/>
           <a:p>
-            <a:pPr algn="ctr" indent="0" marL="0">
+            <a:pPr marL="0" indent="0" algn="ctr">
               <a:buNone/>
             </a:pPr>
             <a:r>
@@ -13040,7 +12747,7 @@
           <a:bodyPr wrap="square" rtlCol="0" anchor="ctr"/>
           <a:lstStyle/>
           <a:p>
-            <a:pPr indent="0" marL="0">
+            <a:pPr marL="0" indent="0">
               <a:buNone/>
             </a:pPr>
             <a:r>
@@ -13076,7 +12783,7 @@
           <a:bodyPr wrap="square" rtlCol="0" anchor="t"/>
           <a:lstStyle/>
           <a:p>
-            <a:pPr indent="0" marL="0">
+            <a:pPr marL="0" indent="0">
               <a:buNone/>
             </a:pPr>
             <a:r>
@@ -13132,7 +12839,7 @@
           <a:bodyPr wrap="square" rtlCol="0" anchor="ctr"/>
           <a:lstStyle/>
           <a:p>
-            <a:pPr algn="ctr" indent="0" marL="0">
+            <a:pPr marL="0" indent="0" algn="ctr">
               <a:buNone/>
             </a:pPr>
             <a:r>
@@ -13213,7 +12920,7 @@
           <a:bodyPr wrap="square" rtlCol="0" anchor="ctr"/>
           <a:lstStyle/>
           <a:p>
-            <a:pPr algn="ctr" indent="0" marL="0">
+            <a:pPr marL="0" indent="0" algn="ctr">
               <a:buNone/>
             </a:pPr>
             <a:r>
@@ -13249,7 +12956,7 @@
           <a:bodyPr wrap="square" rtlCol="0" anchor="ctr"/>
           <a:lstStyle/>
           <a:p>
-            <a:pPr indent="0" marL="0">
+            <a:pPr marL="0" indent="0">
               <a:buNone/>
             </a:pPr>
             <a:r>
@@ -13285,7 +12992,7 @@
           <a:bodyPr wrap="square" rtlCol="0" anchor="t"/>
           <a:lstStyle/>
           <a:p>
-            <a:pPr indent="0" marL="0">
+            <a:pPr marL="0" indent="0">
               <a:buNone/>
             </a:pPr>
             <a:r>
@@ -13341,7 +13048,7 @@
           <a:bodyPr wrap="square" rtlCol="0" anchor="ctr"/>
           <a:lstStyle/>
           <a:p>
-            <a:pPr algn="ctr" indent="0" marL="0">
+            <a:pPr marL="0" indent="0" algn="ctr">
               <a:buNone/>
             </a:pPr>
             <a:r>
@@ -13397,7 +13104,7 @@
           <a:bodyPr wrap="square" rtlCol="0" anchor="ctr"/>
           <a:lstStyle/>
           <a:p>
-            <a:pPr indent="0" marL="0">
+            <a:pPr marL="0" indent="0">
               <a:buNone/>
             </a:pPr>
             <a:r>
@@ -13475,7 +13182,7 @@
           <a:bodyPr wrap="square" rtlCol="0" anchor="ctr"/>
           <a:lstStyle/>
           <a:p>
-            <a:pPr algn="ctr" indent="0" marL="0">
+            <a:pPr marL="0" indent="0" algn="ctr">
               <a:buNone/>
             </a:pPr>
             <a:r>
@@ -13511,7 +13218,7 @@
           <a:bodyPr wrap="square" rtlCol="0" anchor="ctr"/>
           <a:lstStyle/>
           <a:p>
-            <a:pPr indent="0" marL="0">
+            <a:pPr marL="0" indent="0">
               <a:buNone/>
             </a:pPr>
             <a:r>
@@ -13547,7 +13254,7 @@
           <a:bodyPr wrap="square" rtlCol="0" anchor="ctr"/>
           <a:lstStyle/>
           <a:p>
-            <a:pPr algn="r" indent="0" marL="0">
+            <a:pPr marL="0" indent="0" algn="r">
               <a:buNone/>
             </a:pPr>
             <a:r>
@@ -13628,11 +13335,11 @@
           <a:bodyPr wrap="square" rtlCol="0" anchor="ctr"/>
           <a:lstStyle/>
           <a:p>
-            <a:pPr indent="0" marL="0">
-              <a:buNone/>
-            </a:pPr>
-            <a:r>
-              <a:rPr lang="en-US" sz="800" b="1" spc="300" kern="0" dirty="0">
+            <a:pPr marL="0" indent="0">
+              <a:buNone/>
+            </a:pPr>
+            <a:r>
+              <a:rPr lang="en-US" sz="800" b="1" kern="0" spc="300" dirty="0">
                 <a:solidFill>
                   <a:srgbClr val="6B7280"/>
                 </a:solidFill>
@@ -13664,7 +13371,7 @@
           <a:bodyPr wrap="square" rtlCol="0" anchor="ctr"/>
           <a:lstStyle/>
           <a:p>
-            <a:pPr indent="0" marL="0">
+            <a:pPr marL="0" indent="0">
               <a:buNone/>
             </a:pPr>
             <a:r>
@@ -13703,7 +13410,7 @@
           <a:bodyPr wrap="square" rtlCol="0" anchor="ctr"/>
           <a:lstStyle/>
           <a:p>
-            <a:pPr indent="0" marL="0">
+            <a:pPr marL="0" indent="0">
               <a:buNone/>
             </a:pPr>
             <a:r>
@@ -13804,7 +13511,7 @@
           <a:bodyPr wrap="square" rtlCol="0" anchor="ctr"/>
           <a:lstStyle/>
           <a:p>
-            <a:pPr indent="0" marL="0">
+            <a:pPr marL="0" indent="0">
               <a:buNone/>
             </a:pPr>
             <a:r>
@@ -13840,7 +13547,7 @@
           <a:bodyPr wrap="square" rtlCol="0" anchor="ctr"/>
           <a:lstStyle/>
           <a:p>
-            <a:pPr indent="0" marL="0">
+            <a:pPr marL="0" indent="0">
               <a:buNone/>
             </a:pPr>
             <a:r>
@@ -13876,7 +13583,7 @@
           <a:bodyPr wrap="square" rtlCol="0" anchor="t"/>
           <a:lstStyle/>
           <a:p>
-            <a:pPr indent="0" marL="0">
+            <a:pPr marL="0" indent="0">
               <a:buNone/>
             </a:pPr>
             <a:r>
@@ -13954,7 +13661,7 @@
           <a:bodyPr wrap="square" rtlCol="0" anchor="ctr"/>
           <a:lstStyle/>
           <a:p>
-            <a:pPr indent="0" marL="0">
+            <a:pPr marL="0" indent="0">
               <a:buNone/>
             </a:pPr>
             <a:r>
@@ -13990,7 +13697,7 @@
           <a:bodyPr wrap="square" rtlCol="0" anchor="ctr"/>
           <a:lstStyle/>
           <a:p>
-            <a:pPr indent="0" marL="0">
+            <a:pPr marL="0" indent="0">
               <a:buNone/>
             </a:pPr>
             <a:r>
@@ -14026,7 +13733,7 @@
           <a:bodyPr wrap="square" rtlCol="0" anchor="t"/>
           <a:lstStyle/>
           <a:p>
-            <a:pPr indent="0" marL="0">
+            <a:pPr marL="0" indent="0">
               <a:buNone/>
             </a:pPr>
             <a:r>
@@ -14104,7 +13811,7 @@
           <a:bodyPr wrap="square" rtlCol="0" anchor="ctr"/>
           <a:lstStyle/>
           <a:p>
-            <a:pPr indent="0" marL="0">
+            <a:pPr marL="0" indent="0">
               <a:buNone/>
             </a:pPr>
             <a:r>
@@ -14140,7 +13847,7 @@
           <a:bodyPr wrap="square" rtlCol="0" anchor="ctr"/>
           <a:lstStyle/>
           <a:p>
-            <a:pPr indent="0" marL="0">
+            <a:pPr marL="0" indent="0">
               <a:buNone/>
             </a:pPr>
             <a:r>
@@ -14176,7 +13883,7 @@
           <a:bodyPr wrap="square" rtlCol="0" anchor="t"/>
           <a:lstStyle/>
           <a:p>
-            <a:pPr indent="0" marL="0">
+            <a:pPr marL="0" indent="0">
               <a:buNone/>
             </a:pPr>
             <a:r>
@@ -14254,7 +13961,7 @@
           <a:bodyPr wrap="square" rtlCol="0" anchor="ctr"/>
           <a:lstStyle/>
           <a:p>
-            <a:pPr indent="0" marL="0">
+            <a:pPr marL="0" indent="0">
               <a:buNone/>
             </a:pPr>
             <a:r>
@@ -14290,7 +13997,7 @@
           <a:bodyPr wrap="square" rtlCol="0" anchor="ctr"/>
           <a:lstStyle/>
           <a:p>
-            <a:pPr indent="0" marL="0">
+            <a:pPr marL="0" indent="0">
               <a:buNone/>
             </a:pPr>
             <a:r>
@@ -14326,7 +14033,7 @@
           <a:bodyPr wrap="square" rtlCol="0" anchor="t"/>
           <a:lstStyle/>
           <a:p>
-            <a:pPr indent="0" marL="0">
+            <a:pPr marL="0" indent="0">
               <a:buNone/>
             </a:pPr>
             <a:r>
@@ -14389,7 +14096,7 @@
           <a:bodyPr wrap="square" rtlCol="0" anchor="ctr"/>
           <a:lstStyle/>
           <a:p>
-            <a:pPr indent="0" marL="0">
+            <a:pPr marL="0" indent="0">
               <a:buNone/>
             </a:pPr>
             <a:r>
@@ -14425,7 +14132,7 @@
           <a:bodyPr wrap="square" rtlCol="0" anchor="ctr"/>
           <a:lstStyle/>
           <a:p>
-            <a:pPr indent="0" marL="0">
+            <a:pPr marL="0" indent="0">
               <a:buNone/>
             </a:pPr>
             <a:r>
@@ -14503,7 +14210,7 @@
           <a:bodyPr wrap="square" rtlCol="0" anchor="ctr"/>
           <a:lstStyle/>
           <a:p>
-            <a:pPr algn="ctr" indent="0" marL="0">
+            <a:pPr marL="0" indent="0" algn="ctr">
               <a:buNone/>
             </a:pPr>
             <a:r>
@@ -14539,7 +14246,7 @@
           <a:bodyPr wrap="square" rtlCol="0" anchor="ctr"/>
           <a:lstStyle/>
           <a:p>
-            <a:pPr indent="0" marL="0">
+            <a:pPr marL="0" indent="0">
               <a:buNone/>
             </a:pPr>
             <a:r>
@@ -14575,7 +14282,7 @@
           <a:bodyPr wrap="square" rtlCol="0" anchor="ctr"/>
           <a:lstStyle/>
           <a:p>
-            <a:pPr algn="r" indent="0" marL="0">
+            <a:pPr marL="0" indent="0" algn="r">
               <a:buNone/>
             </a:pPr>
             <a:r>
@@ -14656,11 +14363,11 @@
           <a:bodyPr wrap="square" rtlCol="0" anchor="ctr"/>
           <a:lstStyle/>
           <a:p>
-            <a:pPr indent="0" marL="0">
-              <a:buNone/>
-            </a:pPr>
-            <a:r>
-              <a:rPr lang="en-US" sz="800" b="1" spc="300" kern="0" dirty="0">
+            <a:pPr marL="0" indent="0">
+              <a:buNone/>
+            </a:pPr>
+            <a:r>
+              <a:rPr lang="en-US" sz="800" b="1" kern="0" spc="300" dirty="0">
                 <a:solidFill>
                   <a:srgbClr val="6B7280"/>
                 </a:solidFill>
@@ -14692,7 +14399,7 @@
           <a:bodyPr wrap="square" rtlCol="0" anchor="ctr"/>
           <a:lstStyle/>
           <a:p>
-            <a:pPr indent="0" marL="0">
+            <a:pPr marL="0" indent="0">
               <a:buNone/>
             </a:pPr>
             <a:r>
@@ -14779,7 +14486,7 @@
           <a:bodyPr wrap="square" rtlCol="0" anchor="ctr"/>
           <a:lstStyle/>
           <a:p>
-            <a:pPr indent="0" marL="0">
+            <a:pPr marL="0" indent="0">
               <a:buNone/>
             </a:pPr>
             <a:r>
@@ -14815,7 +14522,7 @@
           <a:bodyPr wrap="square" rtlCol="0" anchor="t"/>
           <a:lstStyle/>
           <a:p>
-            <a:pPr indent="0" marL="0">
+            <a:pPr marL="0" indent="0">
               <a:buNone/>
             </a:pPr>
             <a:r>
@@ -14851,7 +14558,7 @@
           <a:bodyPr wrap="square" rtlCol="0" anchor="t"/>
           <a:lstStyle/>
           <a:p>
-            <a:pPr indent="0" marL="0">
+            <a:pPr marL="0" indent="0">
               <a:buNone/>
             </a:pPr>
             <a:r>
@@ -14912,7 +14619,7 @@
           <a:bodyPr wrap="square" rtlCol="0" anchor="ctr"/>
           <a:lstStyle/>
           <a:p>
-            <a:pPr indent="0" marL="0">
+            <a:pPr marL="0" indent="0">
               <a:buNone/>
             </a:pPr>
             <a:r>
@@ -14948,7 +14655,7 @@
           <a:bodyPr wrap="square" rtlCol="0" anchor="t"/>
           <a:lstStyle/>
           <a:p>
-            <a:pPr indent="0" marL="0">
+            <a:pPr marL="0" indent="0">
               <a:buNone/>
             </a:pPr>
             <a:r>
@@ -14984,7 +14691,7 @@
           <a:bodyPr wrap="square" rtlCol="0" anchor="t"/>
           <a:lstStyle/>
           <a:p>
-            <a:pPr indent="0" marL="0">
+            <a:pPr marL="0" indent="0">
               <a:buNone/>
             </a:pPr>
             <a:r>
@@ -15045,7 +14752,7 @@
           <a:bodyPr wrap="square" rtlCol="0" anchor="ctr"/>
           <a:lstStyle/>
           <a:p>
-            <a:pPr indent="0" marL="0">
+            <a:pPr marL="0" indent="0">
               <a:buNone/>
             </a:pPr>
             <a:r>
@@ -15081,7 +14788,7 @@
           <a:bodyPr wrap="square" rtlCol="0" anchor="t"/>
           <a:lstStyle/>
           <a:p>
-            <a:pPr indent="0" marL="0">
+            <a:pPr marL="0" indent="0">
               <a:buNone/>
             </a:pPr>
             <a:r>
@@ -15117,7 +14824,7 @@
           <a:bodyPr wrap="square" rtlCol="0" anchor="t"/>
           <a:lstStyle/>
           <a:p>
-            <a:pPr indent="0" marL="0">
+            <a:pPr marL="0" indent="0">
               <a:buNone/>
             </a:pPr>
             <a:r>
@@ -15178,7 +14885,7 @@
           <a:bodyPr wrap="square" rtlCol="0" anchor="ctr"/>
           <a:lstStyle/>
           <a:p>
-            <a:pPr indent="0" marL="0">
+            <a:pPr marL="0" indent="0">
               <a:buNone/>
             </a:pPr>
             <a:r>
@@ -15214,7 +14921,7 @@
           <a:bodyPr wrap="square" rtlCol="0" anchor="t"/>
           <a:lstStyle/>
           <a:p>
-            <a:pPr indent="0" marL="0">
+            <a:pPr marL="0" indent="0">
               <a:buNone/>
             </a:pPr>
             <a:r>
@@ -15250,7 +14957,7 @@
           <a:bodyPr wrap="square" rtlCol="0" anchor="t"/>
           <a:lstStyle/>
           <a:p>
-            <a:pPr indent="0" marL="0">
+            <a:pPr marL="0" indent="0">
               <a:buNone/>
             </a:pPr>
             <a:r>
@@ -15311,7 +15018,7 @@
           <a:bodyPr wrap="square" rtlCol="0" anchor="ctr"/>
           <a:lstStyle/>
           <a:p>
-            <a:pPr indent="0" marL="0">
+            <a:pPr marL="0" indent="0">
               <a:buNone/>
             </a:pPr>
             <a:r>
@@ -15347,7 +15054,7 @@
           <a:bodyPr wrap="square" rtlCol="0" anchor="t"/>
           <a:lstStyle/>
           <a:p>
-            <a:pPr indent="0" marL="0">
+            <a:pPr marL="0" indent="0">
               <a:buNone/>
             </a:pPr>
             <a:r>
@@ -15383,7 +15090,7 @@
           <a:bodyPr wrap="square" rtlCol="0" anchor="t"/>
           <a:lstStyle/>
           <a:p>
-            <a:pPr indent="0" marL="0">
+            <a:pPr marL="0" indent="0">
               <a:buNone/>
             </a:pPr>
             <a:r>
@@ -15444,7 +15151,7 @@
           <a:bodyPr wrap="square" rtlCol="0" anchor="ctr"/>
           <a:lstStyle/>
           <a:p>
-            <a:pPr indent="0" marL="0">
+            <a:pPr marL="0" indent="0">
               <a:buNone/>
             </a:pPr>
             <a:r>
@@ -15480,7 +15187,7 @@
           <a:bodyPr wrap="square" rtlCol="0" anchor="t"/>
           <a:lstStyle/>
           <a:p>
-            <a:pPr indent="0" marL="0">
+            <a:pPr marL="0" indent="0">
               <a:buNone/>
             </a:pPr>
             <a:r>
@@ -15516,7 +15223,7 @@
           <a:bodyPr wrap="square" rtlCol="0" anchor="t"/>
           <a:lstStyle/>
           <a:p>
-            <a:pPr indent="0" marL="0">
+            <a:pPr marL="0" indent="0">
               <a:buNone/>
             </a:pPr>
             <a:r>
@@ -15577,7 +15284,7 @@
           <a:bodyPr wrap="square" rtlCol="0" anchor="ctr"/>
           <a:lstStyle/>
           <a:p>
-            <a:pPr indent="0" marL="0">
+            <a:pPr marL="0" indent="0">
               <a:buNone/>
             </a:pPr>
             <a:r>
@@ -15613,7 +15320,7 @@
           <a:bodyPr wrap="square" rtlCol="0" anchor="t"/>
           <a:lstStyle/>
           <a:p>
-            <a:pPr indent="0" marL="0">
+            <a:pPr marL="0" indent="0">
               <a:buNone/>
             </a:pPr>
             <a:r>
@@ -15649,7 +15356,7 @@
           <a:bodyPr wrap="square" rtlCol="0" anchor="t"/>
           <a:lstStyle/>
           <a:p>
-            <a:pPr indent="0" marL="0">
+            <a:pPr marL="0" indent="0">
               <a:buNone/>
             </a:pPr>
             <a:r>
@@ -15710,7 +15417,7 @@
           <a:bodyPr wrap="square" rtlCol="0" anchor="ctr"/>
           <a:lstStyle/>
           <a:p>
-            <a:pPr indent="0" marL="0">
+            <a:pPr marL="0" indent="0">
               <a:buNone/>
             </a:pPr>
             <a:r>
@@ -15746,7 +15453,7 @@
           <a:bodyPr wrap="square" rtlCol="0" anchor="t"/>
           <a:lstStyle/>
           <a:p>
-            <a:pPr indent="0" marL="0">
+            <a:pPr marL="0" indent="0">
               <a:buNone/>
             </a:pPr>
             <a:r>
@@ -15782,7 +15489,7 @@
           <a:bodyPr wrap="square" rtlCol="0" anchor="t"/>
           <a:lstStyle/>
           <a:p>
-            <a:pPr indent="0" marL="0">
+            <a:pPr marL="0" indent="0">
               <a:buNone/>
             </a:pPr>
             <a:r>
@@ -15840,7 +15547,7 @@
           <a:bodyPr wrap="square" rtlCol="0" anchor="ctr"/>
           <a:lstStyle/>
           <a:p>
-            <a:pPr indent="0" marL="0">
+            <a:pPr marL="0" indent="0">
               <a:buNone/>
             </a:pPr>
             <a:r>
@@ -15876,7 +15583,7 @@
           <a:bodyPr wrap="square" rtlCol="0" anchor="ctr"/>
           <a:lstStyle/>
           <a:p>
-            <a:pPr indent="0" marL="0">
+            <a:pPr marL="0" indent="0">
               <a:buNone/>
             </a:pPr>
             <a:r>
@@ -15912,7 +15619,7 @@
           <a:bodyPr wrap="square" rtlCol="0" anchor="ctr"/>
           <a:lstStyle/>
           <a:p>
-            <a:pPr indent="0" marL="0">
+            <a:pPr marL="0" indent="0">
               <a:buNone/>
             </a:pPr>
             <a:r>
@@ -15948,7 +15655,7 @@
           <a:bodyPr wrap="square" rtlCol="0" anchor="ctr"/>
           <a:lstStyle/>
           <a:p>
-            <a:pPr indent="0" marL="0">
+            <a:pPr marL="0" indent="0">
               <a:buNone/>
             </a:pPr>
             <a:r>
@@ -15984,7 +15691,7 @@
           <a:bodyPr wrap="square" rtlCol="0" anchor="ctr"/>
           <a:lstStyle/>
           <a:p>
-            <a:pPr indent="0" marL="0">
+            <a:pPr marL="0" indent="0">
               <a:buNone/>
             </a:pPr>
             <a:r>
@@ -16062,7 +15769,7 @@
           <a:bodyPr wrap="square" rtlCol="0" anchor="ctr"/>
           <a:lstStyle/>
           <a:p>
-            <a:pPr algn="ctr" indent="0" marL="0">
+            <a:pPr marL="0" indent="0" algn="ctr">
               <a:buNone/>
             </a:pPr>
             <a:r>
@@ -16098,7 +15805,7 @@
           <a:bodyPr wrap="square" rtlCol="0" anchor="ctr"/>
           <a:lstStyle/>
           <a:p>
-            <a:pPr indent="0" marL="0">
+            <a:pPr marL="0" indent="0">
               <a:buNone/>
             </a:pPr>
             <a:r>
@@ -16134,7 +15841,7 @@
           <a:bodyPr wrap="square" rtlCol="0" anchor="ctr"/>
           <a:lstStyle/>
           <a:p>
-            <a:pPr algn="r" indent="0" marL="0">
+            <a:pPr marL="0" indent="0" algn="r">
               <a:buNone/>
             </a:pPr>
             <a:r>
@@ -16215,11 +15922,11 @@
           <a:bodyPr wrap="square" rtlCol="0" anchor="ctr"/>
           <a:lstStyle/>
           <a:p>
-            <a:pPr indent="0" marL="0">
-              <a:buNone/>
-            </a:pPr>
-            <a:r>
-              <a:rPr lang="en-US" sz="800" b="1" spc="300" kern="0" dirty="0">
+            <a:pPr marL="0" indent="0">
+              <a:buNone/>
+            </a:pPr>
+            <a:r>
+              <a:rPr lang="en-US" sz="800" b="1" kern="0" spc="300" dirty="0">
                 <a:solidFill>
                   <a:srgbClr val="6B7280"/>
                 </a:solidFill>
@@ -16251,7 +15958,7 @@
           <a:bodyPr wrap="square" rtlCol="0" anchor="ctr"/>
           <a:lstStyle/>
           <a:p>
-            <a:pPr indent="0" marL="0">
+            <a:pPr marL="0" indent="0">
               <a:buNone/>
             </a:pPr>
             <a:r>
@@ -16290,7 +15997,7 @@
           <a:bodyPr wrap="square" rtlCol="0" anchor="ctr"/>
           <a:lstStyle/>
           <a:p>
-            <a:pPr indent="0" marL="0">
+            <a:pPr marL="0" indent="0">
               <a:buNone/>
             </a:pPr>
             <a:r>
@@ -16349,7 +16056,7 @@
           </a:solidFill>
           <a:ln/>
           <a:effectLst>
-            <a:outerShdw sx="100000" sy="100000" kx="0" ky="0" algn="bl" rotWithShape="0" blurRad="63500" dist="25400" dir="8100000">
+            <a:outerShdw blurRad="63500" dist="25400" dir="8100000" algn="bl" rotWithShape="0">
               <a:srgbClr val="000000">
                 <a:alpha val="8000"/>
               </a:srgbClr>
@@ -16378,11 +16085,11 @@
           <a:bodyPr wrap="square" rtlCol="0" anchor="ctr"/>
           <a:lstStyle/>
           <a:p>
-            <a:pPr algn="ctr" indent="0" marL="0">
-              <a:buNone/>
-            </a:pPr>
-            <a:r>
-              <a:rPr lang="en-US" sz="900" b="1" spc="200" kern="0" dirty="0">
+            <a:pPr marL="0" indent="0" algn="ctr">
+              <a:buNone/>
+            </a:pPr>
+            <a:r>
+              <a:rPr lang="en-US" sz="900" b="1" kern="0" spc="200" dirty="0">
                 <a:solidFill>
                   <a:srgbClr val="1E6FA8"/>
                 </a:solidFill>
@@ -16434,7 +16141,7 @@
           <a:bodyPr wrap="square" rtlCol="0" anchor="ctr"/>
           <a:lstStyle/>
           <a:p>
-            <a:pPr algn="ctr" indent="0" marL="0">
+            <a:pPr marL="0" indent="0" algn="ctr">
               <a:buNone/>
             </a:pPr>
             <a:r>
@@ -16493,7 +16200,7 @@
           <a:bodyPr wrap="square" rtlCol="0" anchor="ctr"/>
           <a:lstStyle/>
           <a:p>
-            <a:pPr algn="ctr" indent="0" marL="0">
+            <a:pPr marL="0" indent="0" algn="ctr">
               <a:buNone/>
             </a:pPr>
             <a:r>
@@ -16549,7 +16256,7 @@
           <a:bodyPr wrap="square" rtlCol="0" anchor="ctr"/>
           <a:lstStyle/>
           <a:p>
-            <a:pPr algn="ctr" indent="0" marL="0">
+            <a:pPr marL="0" indent="0" algn="ctr">
               <a:buNone/>
             </a:pPr>
             <a:r>
@@ -16563,7 +16270,7 @@
             <a:endParaRPr lang="en-US" sz="900" dirty="0"/>
           </a:p>
           <a:p>
-            <a:pPr algn="ctr" indent="0" marL="0">
+            <a:pPr marL="0" indent="0" algn="ctr">
               <a:buNone/>
             </a:pPr>
             <a:r>
@@ -16577,7 +16284,7 @@
             <a:endParaRPr lang="en-US" sz="900" dirty="0"/>
           </a:p>
           <a:p>
-            <a:pPr algn="ctr" indent="0" marL="0">
+            <a:pPr marL="0" indent="0" algn="ctr">
               <a:buNone/>
             </a:pPr>
             <a:r>
@@ -16613,7 +16320,7 @@
           </a:solidFill>
           <a:ln/>
           <a:effectLst>
-            <a:outerShdw sx="100000" sy="100000" kx="0" ky="0" algn="bl" rotWithShape="0" blurRad="63500" dist="25400" dir="8100000">
+            <a:outerShdw blurRad="63500" dist="25400" dir="8100000" algn="bl" rotWithShape="0">
               <a:srgbClr val="000000">
                 <a:alpha val="8000"/>
               </a:srgbClr>
@@ -16642,7 +16349,7 @@
           <a:bodyPr wrap="square" rtlCol="0" anchor="ctr"/>
           <a:lstStyle/>
           <a:p>
-            <a:pPr indent="0" marL="0">
+            <a:pPr marL="0" indent="0">
               <a:buNone/>
             </a:pPr>
             <a:r>
@@ -16698,7 +16405,7 @@
           <a:bodyPr wrap="square" rtlCol="0" anchor="t"/>
           <a:lstStyle/>
           <a:p>
-            <a:pPr indent="0" marL="0">
+            <a:pPr marL="0" indent="0">
               <a:buNone/>
             </a:pPr>
             <a:r>
@@ -16754,7 +16461,7 @@
           <a:bodyPr wrap="square" rtlCol="0" anchor="t"/>
           <a:lstStyle/>
           <a:p>
-            <a:pPr indent="0" marL="0">
+            <a:pPr marL="0" indent="0">
               <a:buNone/>
             </a:pPr>
             <a:r>
@@ -16810,7 +16517,7 @@
           <a:bodyPr wrap="square" rtlCol="0" anchor="t"/>
           <a:lstStyle/>
           <a:p>
-            <a:pPr indent="0" marL="0">
+            <a:pPr marL="0" indent="0">
               <a:buNone/>
             </a:pPr>
             <a:r>
@@ -16866,7 +16573,7 @@
           <a:bodyPr wrap="square" rtlCol="0" anchor="t"/>
           <a:lstStyle/>
           <a:p>
-            <a:pPr indent="0" marL="0">
+            <a:pPr marL="0" indent="0">
               <a:buNone/>
             </a:pPr>
             <a:r>
@@ -16922,7 +16629,7 @@
           <a:bodyPr wrap="square" rtlCol="0" anchor="t"/>
           <a:lstStyle/>
           <a:p>
-            <a:pPr indent="0" marL="0">
+            <a:pPr marL="0" indent="0">
               <a:buNone/>
             </a:pPr>
             <a:r>
@@ -16998,7 +16705,7 @@
           <a:bodyPr wrap="square" rtlCol="0" anchor="ctr"/>
           <a:lstStyle/>
           <a:p>
-            <a:pPr indent="0" marL="0">
+            <a:pPr marL="0" indent="0">
               <a:buNone/>
             </a:pPr>
             <a:r>
@@ -17076,7 +16783,7 @@
           <a:bodyPr wrap="square" rtlCol="0" anchor="ctr"/>
           <a:lstStyle/>
           <a:p>
-            <a:pPr algn="ctr" indent="0" marL="0">
+            <a:pPr marL="0" indent="0" algn="ctr">
               <a:buNone/>
             </a:pPr>
             <a:r>
@@ -17112,7 +16819,7 @@
           <a:bodyPr wrap="square" rtlCol="0" anchor="ctr"/>
           <a:lstStyle/>
           <a:p>
-            <a:pPr indent="0" marL="0">
+            <a:pPr marL="0" indent="0">
               <a:buNone/>
             </a:pPr>
             <a:r>
@@ -17148,7 +16855,7 @@
           <a:bodyPr wrap="square" rtlCol="0" anchor="ctr"/>
           <a:lstStyle/>
           <a:p>
-            <a:pPr algn="r" indent="0" marL="0">
+            <a:pPr marL="0" indent="0" algn="r">
               <a:buNone/>
             </a:pPr>
             <a:r>
@@ -17199,6 +16906,7 @@
         <a:solidFill>
           <a:srgbClr val="004B87"/>
         </a:solidFill>
+        <a:effectLst/>
       </p:bgPr>
     </p:bg>
     <p:spTree>
@@ -17258,7 +16966,7 @@
           <a:bodyPr wrap="square" rtlCol="0" anchor="ctr"/>
           <a:lstStyle/>
           <a:p>
-            <a:pPr algn="ctr" indent="0" marL="0">
+            <a:pPr marL="0" indent="0" algn="ctr">
               <a:buNone/>
             </a:pPr>
             <a:r>
@@ -17294,7 +17002,7 @@
           <a:bodyPr wrap="square" rtlCol="0" anchor="ctr"/>
           <a:lstStyle/>
           <a:p>
-            <a:pPr algn="ctr" indent="0" marL="0">
+            <a:pPr marL="0" indent="0" algn="ctr">
               <a:buNone/>
             </a:pPr>
             <a:r>
@@ -17330,7 +17038,7 @@
           <a:bodyPr wrap="square" rtlCol="0" anchor="ctr"/>
           <a:lstStyle/>
           <a:p>
-            <a:pPr algn="ctr" indent="0" marL="0">
+            <a:pPr marL="0" indent="0" algn="ctr">
               <a:buNone/>
             </a:pPr>
             <a:r>
@@ -17411,7 +17119,7 @@
           <a:bodyPr wrap="square" rtlCol="0" anchor="ctr"/>
           <a:lstStyle/>
           <a:p>
-            <a:pPr algn="ctr" indent="0" marL="0">
+            <a:pPr marL="0" indent="0" algn="ctr">
               <a:buNone/>
             </a:pPr>
             <a:r>
@@ -17447,7 +17155,7 @@
           <a:bodyPr wrap="square" rtlCol="0" anchor="ctr"/>
           <a:lstStyle/>
           <a:p>
-            <a:pPr algn="ctr" indent="0" marL="0">
+            <a:pPr marL="0" indent="0" algn="ctr">
               <a:buNone/>
             </a:pPr>
             <a:r>
@@ -17505,7 +17213,7 @@
           <a:bodyPr wrap="square" rtlCol="0" anchor="ctr"/>
           <a:lstStyle/>
           <a:p>
-            <a:pPr algn="ctr" indent="0" marL="0">
+            <a:pPr marL="0" indent="0" algn="ctr">
               <a:buNone/>
             </a:pPr>
             <a:r>
@@ -17541,7 +17249,7 @@
           <a:bodyPr wrap="square" rtlCol="0" anchor="ctr"/>
           <a:lstStyle/>
           <a:p>
-            <a:pPr algn="ctr" indent="0" marL="0">
+            <a:pPr marL="0" indent="0" algn="ctr">
               <a:buNone/>
             </a:pPr>
             <a:r>
@@ -17599,7 +17307,7 @@
           <a:bodyPr wrap="square" rtlCol="0" anchor="ctr"/>
           <a:lstStyle/>
           <a:p>
-            <a:pPr algn="ctr" indent="0" marL="0">
+            <a:pPr marL="0" indent="0" algn="ctr">
               <a:buNone/>
             </a:pPr>
             <a:r>
@@ -17635,7 +17343,7 @@
           <a:bodyPr wrap="square" rtlCol="0" anchor="ctr"/>
           <a:lstStyle/>
           <a:p>
-            <a:pPr algn="ctr" indent="0" marL="0">
+            <a:pPr marL="0" indent="0" algn="ctr">
               <a:buNone/>
             </a:pPr>
             <a:r>
@@ -17693,7 +17401,7 @@
           <a:bodyPr wrap="square" rtlCol="0" anchor="ctr"/>
           <a:lstStyle/>
           <a:p>
-            <a:pPr algn="ctr" indent="0" marL="0">
+            <a:pPr marL="0" indent="0" algn="ctr">
               <a:buNone/>
             </a:pPr>
             <a:r>
@@ -17729,7 +17437,7 @@
           <a:bodyPr wrap="square" rtlCol="0" anchor="ctr"/>
           <a:lstStyle/>
           <a:p>
-            <a:pPr algn="ctr" indent="0" marL="0">
+            <a:pPr marL="0" indent="0" algn="ctr">
               <a:buNone/>
             </a:pPr>
             <a:r>
@@ -17787,7 +17495,7 @@
           <a:bodyPr wrap="square" rtlCol="0" anchor="ctr"/>
           <a:lstStyle/>
           <a:p>
-            <a:pPr algn="ctr" indent="0" marL="0">
+            <a:pPr marL="0" indent="0" algn="ctr">
               <a:buNone/>
             </a:pPr>
             <a:r>
@@ -17823,7 +17531,7 @@
           <a:bodyPr wrap="square" rtlCol="0" anchor="ctr"/>
           <a:lstStyle/>
           <a:p>
-            <a:pPr algn="ctr" indent="0" marL="0">
+            <a:pPr marL="0" indent="0" algn="ctr">
               <a:buNone/>
             </a:pPr>
             <a:r>
@@ -17859,7 +17567,7 @@
           <a:bodyPr wrap="square" rtlCol="0" anchor="ctr"/>
           <a:lstStyle/>
           <a:p>
-            <a:pPr algn="ctr" indent="0" marL="0">
+            <a:pPr marL="0" indent="0" algn="ctr">
               <a:buNone/>
             </a:pPr>
             <a:r>
@@ -17917,7 +17625,7 @@
           <a:bodyPr wrap="square" rtlCol="0" anchor="ctr"/>
           <a:lstStyle/>
           <a:p>
-            <a:pPr algn="ctr" indent="0" marL="0">
+            <a:pPr marL="0" indent="0" algn="ctr">
               <a:buNone/>
             </a:pPr>
             <a:r>
@@ -17995,7 +17703,7 @@
           <a:bodyPr wrap="square" rtlCol="0" anchor="ctr"/>
           <a:lstStyle/>
           <a:p>
-            <a:pPr algn="ctr" indent="0" marL="0">
+            <a:pPr marL="0" indent="0" algn="ctr">
               <a:buNone/>
             </a:pPr>
             <a:r>
@@ -18031,7 +17739,7 @@
           <a:bodyPr wrap="square" rtlCol="0" anchor="ctr"/>
           <a:lstStyle/>
           <a:p>
-            <a:pPr indent="0" marL="0">
+            <a:pPr marL="0" indent="0">
               <a:buNone/>
             </a:pPr>
             <a:r>
@@ -18067,7 +17775,7 @@
           <a:bodyPr wrap="square" rtlCol="0" anchor="ctr"/>
           <a:lstStyle/>
           <a:p>
-            <a:pPr algn="r" indent="0" marL="0">
+            <a:pPr marL="0" indent="0" algn="r">
               <a:buNone/>
             </a:pPr>
             <a:r>
@@ -18148,11 +17856,11 @@
           <a:bodyPr wrap="square" rtlCol="0" anchor="ctr"/>
           <a:lstStyle/>
           <a:p>
-            <a:pPr indent="0" marL="0">
-              <a:buNone/>
-            </a:pPr>
-            <a:r>
-              <a:rPr lang="en-US" sz="800" b="1" spc="300" kern="0" dirty="0">
+            <a:pPr marL="0" indent="0">
+              <a:buNone/>
+            </a:pPr>
+            <a:r>
+              <a:rPr lang="en-US" sz="800" b="1" kern="0" spc="300" dirty="0">
                 <a:solidFill>
                   <a:srgbClr val="6B7280"/>
                 </a:solidFill>
@@ -18184,7 +17892,7 @@
           <a:bodyPr wrap="square" rtlCol="0" anchor="ctr"/>
           <a:lstStyle/>
           <a:p>
-            <a:pPr indent="0" marL="0">
+            <a:pPr marL="0" indent="0">
               <a:buNone/>
             </a:pPr>
             <a:r>
@@ -18268,7 +17976,7 @@
           <a:bodyPr wrap="square" rtlCol="0" anchor="ctr"/>
           <a:lstStyle/>
           <a:p>
-            <a:pPr algn="ctr" indent="0" marL="0">
+            <a:pPr marL="0" indent="0" algn="ctr">
               <a:buNone/>
             </a:pPr>
             <a:r>
@@ -18304,7 +18012,7 @@
           <a:bodyPr wrap="square" rtlCol="0" anchor="ctr"/>
           <a:lstStyle/>
           <a:p>
-            <a:pPr algn="ctr" indent="0" marL="0">
+            <a:pPr marL="0" indent="0" algn="ctr">
               <a:buNone/>
             </a:pPr>
             <a:r>
@@ -18362,7 +18070,7 @@
           <a:bodyPr wrap="square" rtlCol="0" anchor="ctr"/>
           <a:lstStyle/>
           <a:p>
-            <a:pPr algn="ctr" indent="0" marL="0">
+            <a:pPr marL="0" indent="0" algn="ctr">
               <a:buNone/>
             </a:pPr>
             <a:r>
@@ -18398,7 +18106,7 @@
           <a:bodyPr wrap="square" rtlCol="0" anchor="ctr"/>
           <a:lstStyle/>
           <a:p>
-            <a:pPr algn="ctr" indent="0" marL="0">
+            <a:pPr marL="0" indent="0" algn="ctr">
               <a:buNone/>
             </a:pPr>
             <a:r>
@@ -18456,7 +18164,7 @@
           <a:bodyPr wrap="square" rtlCol="0" anchor="ctr"/>
           <a:lstStyle/>
           <a:p>
-            <a:pPr algn="ctr" indent="0" marL="0">
+            <a:pPr marL="0" indent="0" algn="ctr">
               <a:buNone/>
             </a:pPr>
             <a:r>
@@ -18492,7 +18200,7 @@
           <a:bodyPr wrap="square" rtlCol="0" anchor="ctr"/>
           <a:lstStyle/>
           <a:p>
-            <a:pPr algn="ctr" indent="0" marL="0">
+            <a:pPr marL="0" indent="0" algn="ctr">
               <a:buNone/>
             </a:pPr>
             <a:r>
@@ -18550,7 +18258,7 @@
           <a:bodyPr wrap="square" rtlCol="0" anchor="ctr"/>
           <a:lstStyle/>
           <a:p>
-            <a:pPr algn="ctr" indent="0" marL="0">
+            <a:pPr marL="0" indent="0" algn="ctr">
               <a:buNone/>
             </a:pPr>
             <a:r>
@@ -18586,7 +18294,7 @@
           <a:bodyPr wrap="square" rtlCol="0" anchor="ctr"/>
           <a:lstStyle/>
           <a:p>
-            <a:pPr algn="ctr" indent="0" marL="0">
+            <a:pPr marL="0" indent="0" algn="ctr">
               <a:buNone/>
             </a:pPr>
             <a:r>
@@ -18644,7 +18352,7 @@
           <a:bodyPr wrap="square" rtlCol="0" anchor="ctr"/>
           <a:lstStyle/>
           <a:p>
-            <a:pPr algn="ctr" indent="0" marL="0">
+            <a:pPr marL="0" indent="0" algn="ctr">
               <a:buNone/>
             </a:pPr>
             <a:r>
@@ -18680,7 +18388,7 @@
           <a:bodyPr wrap="square" rtlCol="0" anchor="ctr"/>
           <a:lstStyle/>
           <a:p>
-            <a:pPr algn="ctr" indent="0" marL="0">
+            <a:pPr marL="0" indent="0" algn="ctr">
               <a:buNone/>
             </a:pPr>
             <a:r>
@@ -18738,7 +18446,7 @@
           <a:bodyPr wrap="square" rtlCol="0" anchor="ctr"/>
           <a:lstStyle/>
           <a:p>
-            <a:pPr algn="ctr" indent="0" marL="0">
+            <a:pPr marL="0" indent="0" algn="ctr">
               <a:buNone/>
             </a:pPr>
             <a:r>
@@ -18774,7 +18482,7 @@
           <a:bodyPr wrap="square" rtlCol="0" anchor="ctr"/>
           <a:lstStyle/>
           <a:p>
-            <a:pPr algn="ctr" indent="0" marL="0">
+            <a:pPr marL="0" indent="0" algn="ctr">
               <a:buNone/>
             </a:pPr>
             <a:r>
@@ -18832,7 +18540,7 @@
           <a:bodyPr wrap="square" rtlCol="0" anchor="ctr"/>
           <a:lstStyle/>
           <a:p>
-            <a:pPr algn="ctr" indent="0" marL="0">
+            <a:pPr marL="0" indent="0" algn="ctr">
               <a:buNone/>
             </a:pPr>
             <a:r>
@@ -18868,7 +18576,7 @@
           <a:bodyPr wrap="square" rtlCol="0" anchor="ctr"/>
           <a:lstStyle/>
           <a:p>
-            <a:pPr algn="ctr" indent="0" marL="0">
+            <a:pPr marL="0" indent="0" algn="ctr">
               <a:buNone/>
             </a:pPr>
             <a:r>
@@ -18926,7 +18634,7 @@
           <a:bodyPr wrap="square" rtlCol="0" anchor="ctr"/>
           <a:lstStyle/>
           <a:p>
-            <a:pPr algn="ctr" indent="0" marL="0">
+            <a:pPr marL="0" indent="0" algn="ctr">
               <a:buNone/>
             </a:pPr>
             <a:r>
@@ -18989,7 +18697,7 @@
           <a:bodyPr wrap="square" rtlCol="0" anchor="ctr"/>
           <a:lstStyle/>
           <a:p>
-            <a:pPr indent="0" marL="0">
+            <a:pPr marL="0" indent="0">
               <a:buNone/>
             </a:pPr>
             <a:r>
@@ -19025,7 +18733,7 @@
           <a:bodyPr wrap="square" rtlCol="0" anchor="ctr"/>
           <a:lstStyle/>
           <a:p>
-            <a:pPr indent="0" marL="0">
+            <a:pPr marL="0" indent="0">
               <a:buNone/>
             </a:pPr>
             <a:r>
@@ -19103,7 +18811,7 @@
           <a:bodyPr wrap="square" rtlCol="0" anchor="ctr"/>
           <a:lstStyle/>
           <a:p>
-            <a:pPr indent="0" marL="0">
+            <a:pPr marL="0" indent="0">
               <a:buNone/>
             </a:pPr>
             <a:r>
@@ -19181,7 +18889,7 @@
           <a:bodyPr wrap="square" rtlCol="0" anchor="ctr"/>
           <a:lstStyle/>
           <a:p>
-            <a:pPr algn="ctr" indent="0" marL="0">
+            <a:pPr marL="0" indent="0" algn="ctr">
               <a:buNone/>
             </a:pPr>
             <a:r>
@@ -19217,7 +18925,7 @@
           <a:bodyPr wrap="square" rtlCol="0" anchor="ctr"/>
           <a:lstStyle/>
           <a:p>
-            <a:pPr indent="0" marL="0">
+            <a:pPr marL="0" indent="0">
               <a:buNone/>
             </a:pPr>
             <a:r>
@@ -19253,7 +18961,7 @@
           <a:bodyPr wrap="square" rtlCol="0" anchor="ctr"/>
           <a:lstStyle/>
           <a:p>
-            <a:pPr algn="r" indent="0" marL="0">
+            <a:pPr marL="0" indent="0" algn="r">
               <a:buNone/>
             </a:pPr>
             <a:r>
@@ -19334,11 +19042,11 @@
           <a:bodyPr wrap="square" rtlCol="0" anchor="ctr"/>
           <a:lstStyle/>
           <a:p>
-            <a:pPr indent="0" marL="0">
-              <a:buNone/>
-            </a:pPr>
-            <a:r>
-              <a:rPr lang="en-US" sz="800" b="1" spc="300" kern="0" dirty="0">
+            <a:pPr marL="0" indent="0">
+              <a:buNone/>
+            </a:pPr>
+            <a:r>
+              <a:rPr lang="en-US" sz="800" b="1" kern="0" spc="300" dirty="0">
                 <a:solidFill>
                   <a:srgbClr val="6B7280"/>
                 </a:solidFill>
@@ -19370,7 +19078,7 @@
           <a:bodyPr wrap="square" rtlCol="0" anchor="ctr"/>
           <a:lstStyle/>
           <a:p>
-            <a:pPr indent="0" marL="0">
+            <a:pPr marL="0" indent="0">
               <a:buNone/>
             </a:pPr>
             <a:r>
@@ -19409,7 +19117,7 @@
           <a:bodyPr wrap="square" rtlCol="0" anchor="ctr"/>
           <a:lstStyle/>
           <a:p>
-            <a:pPr indent="0" marL="0">
+            <a:pPr marL="0" indent="0">
               <a:buNone/>
             </a:pPr>
             <a:r>
@@ -19510,7 +19218,7 @@
           <a:bodyPr wrap="square" rtlCol="0" anchor="ctr"/>
           <a:lstStyle/>
           <a:p>
-            <a:pPr indent="0" marL="0">
+            <a:pPr marL="0" indent="0">
               <a:buNone/>
             </a:pPr>
             <a:r>
@@ -19546,11 +19254,11 @@
           <a:bodyPr wrap="square" rtlCol="0" anchor="ctr"/>
           <a:lstStyle/>
           <a:p>
-            <a:pPr indent="0" marL="0">
-              <a:buNone/>
-            </a:pPr>
-            <a:r>
-              <a:rPr lang="en-US" sz="800" b="1" spc="300" kern="0" dirty="0">
+            <a:pPr marL="0" indent="0">
+              <a:buNone/>
+            </a:pPr>
+            <a:r>
+              <a:rPr lang="en-US" sz="800" b="1" kern="0" spc="300" dirty="0">
                 <a:solidFill>
                   <a:srgbClr val="6B7280"/>
                 </a:solidFill>
@@ -19604,7 +19312,7 @@
           <a:bodyPr wrap="square" rtlCol="0" anchor="ctr"/>
           <a:lstStyle/>
           <a:p>
-            <a:pPr algn="ctr" indent="0" marL="0">
+            <a:pPr marL="0" indent="0" algn="ctr">
               <a:buNone/>
             </a:pPr>
             <a:r>
@@ -19640,7 +19348,7 @@
           <a:bodyPr wrap="square" rtlCol="0" anchor="ctr"/>
           <a:lstStyle/>
           <a:p>
-            <a:pPr algn="ctr" indent="0" marL="0">
+            <a:pPr marL="0" indent="0" algn="ctr">
               <a:buNone/>
             </a:pPr>
             <a:r>
@@ -19698,7 +19406,7 @@
           <a:bodyPr wrap="square" rtlCol="0" anchor="ctr"/>
           <a:lstStyle/>
           <a:p>
-            <a:pPr algn="ctr" indent="0" marL="0">
+            <a:pPr marL="0" indent="0" algn="ctr">
               <a:buNone/>
             </a:pPr>
             <a:r>
@@ -19734,7 +19442,7 @@
           <a:bodyPr wrap="square" rtlCol="0" anchor="ctr"/>
           <a:lstStyle/>
           <a:p>
-            <a:pPr algn="ctr" indent="0" marL="0">
+            <a:pPr marL="0" indent="0" algn="ctr">
               <a:buNone/>
             </a:pPr>
             <a:r>
@@ -19792,7 +19500,7 @@
           <a:bodyPr wrap="square" rtlCol="0" anchor="ctr"/>
           <a:lstStyle/>
           <a:p>
-            <a:pPr algn="ctr" indent="0" marL="0">
+            <a:pPr marL="0" indent="0" algn="ctr">
               <a:buNone/>
             </a:pPr>
             <a:r>
@@ -19828,7 +19536,7 @@
           <a:bodyPr wrap="square" rtlCol="0" anchor="ctr"/>
           <a:lstStyle/>
           <a:p>
-            <a:pPr algn="ctr" indent="0" marL="0">
+            <a:pPr marL="0" indent="0" algn="ctr">
               <a:buNone/>
             </a:pPr>
             <a:r>
@@ -19886,7 +19594,7 @@
           <a:bodyPr wrap="square" rtlCol="0" anchor="ctr"/>
           <a:lstStyle/>
           <a:p>
-            <a:pPr algn="ctr" indent="0" marL="0">
+            <a:pPr marL="0" indent="0" algn="ctr">
               <a:buNone/>
             </a:pPr>
             <a:r>
@@ -19922,7 +19630,7 @@
           <a:bodyPr wrap="square" rtlCol="0" anchor="ctr"/>
           <a:lstStyle/>
           <a:p>
-            <a:pPr algn="ctr" indent="0" marL="0">
+            <a:pPr marL="0" indent="0" algn="ctr">
               <a:buNone/>
             </a:pPr>
             <a:r>
@@ -19980,7 +19688,7 @@
           <a:bodyPr wrap="square" rtlCol="0" anchor="ctr"/>
           <a:lstStyle/>
           <a:p>
-            <a:pPr algn="ctr" indent="0" marL="0">
+            <a:pPr marL="0" indent="0" algn="ctr">
               <a:buNone/>
             </a:pPr>
             <a:r>
@@ -20043,7 +19751,7 @@
           <a:bodyPr wrap="square" rtlCol="0" anchor="ctr"/>
           <a:lstStyle/>
           <a:p>
-            <a:pPr indent="0" marL="0">
+            <a:pPr marL="0" indent="0">
               <a:buNone/>
             </a:pPr>
             <a:r>
@@ -20079,7 +19787,7 @@
           <a:bodyPr wrap="square" rtlCol="0" anchor="ctr"/>
           <a:lstStyle/>
           <a:p>
-            <a:pPr indent="0" marL="0">
+            <a:pPr marL="0" indent="0">
               <a:buNone/>
             </a:pPr>
             <a:r>
@@ -20137,7 +19845,7 @@
           <a:bodyPr wrap="square" rtlCol="0" anchor="ctr"/>
           <a:lstStyle/>
           <a:p>
-            <a:pPr algn="ctr" indent="0" marL="0">
+            <a:pPr marL="0" indent="0" algn="ctr">
               <a:buNone/>
             </a:pPr>
             <a:r>
@@ -20173,7 +19881,7 @@
           <a:bodyPr wrap="square" rtlCol="0" anchor="ctr"/>
           <a:lstStyle/>
           <a:p>
-            <a:pPr algn="ctr" indent="0" marL="0">
+            <a:pPr marL="0" indent="0" algn="ctr">
               <a:buNone/>
             </a:pPr>
             <a:r>
@@ -20231,7 +19939,7 @@
           <a:bodyPr wrap="square" rtlCol="0" anchor="ctr"/>
           <a:lstStyle/>
           <a:p>
-            <a:pPr algn="ctr" indent="0" marL="0">
+            <a:pPr marL="0" indent="0" algn="ctr">
               <a:buNone/>
             </a:pPr>
             <a:r>
@@ -20267,7 +19975,7 @@
           <a:bodyPr wrap="square" rtlCol="0" anchor="ctr"/>
           <a:lstStyle/>
           <a:p>
-            <a:pPr algn="ctr" indent="0" marL="0">
+            <a:pPr marL="0" indent="0" algn="ctr">
               <a:buNone/>
             </a:pPr>
             <a:r>
@@ -20325,7 +20033,7 @@
           <a:bodyPr wrap="square" rtlCol="0" anchor="ctr"/>
           <a:lstStyle/>
           <a:p>
-            <a:pPr algn="ctr" indent="0" marL="0">
+            <a:pPr marL="0" indent="0" algn="ctr">
               <a:buNone/>
             </a:pPr>
             <a:r>
@@ -20361,7 +20069,7 @@
           <a:bodyPr wrap="square" rtlCol="0" anchor="ctr"/>
           <a:lstStyle/>
           <a:p>
-            <a:pPr algn="ctr" indent="0" marL="0">
+            <a:pPr marL="0" indent="0" algn="ctr">
               <a:buNone/>
             </a:pPr>
             <a:r>
@@ -20419,7 +20127,7 @@
           <a:bodyPr wrap="square" rtlCol="0" anchor="ctr"/>
           <a:lstStyle/>
           <a:p>
-            <a:pPr algn="ctr" indent="0" marL="0">
+            <a:pPr marL="0" indent="0" algn="ctr">
               <a:buNone/>
             </a:pPr>
             <a:r>
@@ -20455,7 +20163,7 @@
           <a:bodyPr wrap="square" rtlCol="0" anchor="ctr"/>
           <a:lstStyle/>
           <a:p>
-            <a:pPr algn="ctr" indent="0" marL="0">
+            <a:pPr marL="0" indent="0" algn="ctr">
               <a:buNone/>
             </a:pPr>
             <a:r>
@@ -20533,7 +20241,7 @@
           <a:bodyPr wrap="square" rtlCol="0" anchor="ctr"/>
           <a:lstStyle/>
           <a:p>
-            <a:pPr algn="ctr" indent="0" marL="0">
+            <a:pPr marL="0" indent="0" algn="ctr">
               <a:buNone/>
             </a:pPr>
             <a:r>
@@ -20569,7 +20277,7 @@
           <a:bodyPr wrap="square" rtlCol="0" anchor="ctr"/>
           <a:lstStyle/>
           <a:p>
-            <a:pPr indent="0" marL="0">
+            <a:pPr marL="0" indent="0">
               <a:buNone/>
             </a:pPr>
             <a:r>
@@ -20605,7 +20313,7 @@
           <a:bodyPr wrap="square" rtlCol="0" anchor="ctr"/>
           <a:lstStyle/>
           <a:p>
-            <a:pPr algn="r" indent="0" marL="0">
+            <a:pPr marL="0" indent="0" algn="r">
               <a:buNone/>
             </a:pPr>
             <a:r>
@@ -20686,11 +20394,11 @@
           <a:bodyPr wrap="square" rtlCol="0" anchor="ctr"/>
           <a:lstStyle/>
           <a:p>
-            <a:pPr indent="0" marL="0">
-              <a:buNone/>
-            </a:pPr>
-            <a:r>
-              <a:rPr lang="en-US" sz="800" b="1" spc="300" kern="0" dirty="0">
+            <a:pPr marL="0" indent="0">
+              <a:buNone/>
+            </a:pPr>
+            <a:r>
+              <a:rPr lang="en-US" sz="800" b="1" kern="0" spc="300" dirty="0">
                 <a:solidFill>
                   <a:srgbClr val="6B7280"/>
                 </a:solidFill>
@@ -20722,7 +20430,7 @@
           <a:bodyPr wrap="square" rtlCol="0" anchor="ctr"/>
           <a:lstStyle/>
           <a:p>
-            <a:pPr indent="0" marL="0">
+            <a:pPr marL="0" indent="0">
               <a:buNone/>
             </a:pPr>
             <a:r>
@@ -20761,7 +20469,7 @@
           <a:bodyPr wrap="square" rtlCol="0" anchor="ctr"/>
           <a:lstStyle/>
           <a:p>
-            <a:pPr indent="0" marL="0">
+            <a:pPr marL="0" indent="0">
               <a:buNone/>
             </a:pPr>
             <a:r>
@@ -20865,11 +20573,11 @@
           <a:bodyPr wrap="square" rtlCol="0" anchor="ctr"/>
           <a:lstStyle/>
           <a:p>
-            <a:pPr indent="0" marL="0">
-              <a:buNone/>
-            </a:pPr>
-            <a:r>
-              <a:rPr lang="en-US" sz="1100" b="1" spc="200" kern="0" dirty="0">
+            <a:pPr marL="0" indent="0">
+              <a:buNone/>
+            </a:pPr>
+            <a:r>
+              <a:rPr lang="en-US" sz="1100" b="1" kern="0" spc="200" dirty="0">
                 <a:solidFill>
                   <a:srgbClr val="166534"/>
                 </a:solidFill>
@@ -20923,7 +20631,7 @@
           <a:bodyPr wrap="square" rtlCol="0" anchor="ctr"/>
           <a:lstStyle/>
           <a:p>
-            <a:pPr algn="ctr" indent="0" marL="0">
+            <a:pPr marL="0" indent="0" algn="ctr">
               <a:buNone/>
             </a:pPr>
             <a:r>
@@ -20959,7 +20667,7 @@
           <a:bodyPr wrap="square" rtlCol="0" anchor="ctr"/>
           <a:lstStyle/>
           <a:p>
-            <a:pPr indent="0" marL="0">
+            <a:pPr marL="0" indent="0">
               <a:buNone/>
             </a:pPr>
             <a:r>
@@ -21015,7 +20723,7 @@
           <a:bodyPr wrap="square" rtlCol="0" anchor="ctr"/>
           <a:lstStyle/>
           <a:p>
-            <a:pPr algn="ctr" indent="0" marL="0">
+            <a:pPr marL="0" indent="0" algn="ctr">
               <a:buNone/>
             </a:pPr>
             <a:r>
@@ -21051,7 +20759,7 @@
           <a:bodyPr wrap="square" rtlCol="0" anchor="t"/>
           <a:lstStyle/>
           <a:p>
-            <a:pPr indent="0" marL="0">
+            <a:pPr marL="0" indent="0">
               <a:buNone/>
             </a:pPr>
             <a:r>
@@ -21107,7 +20815,7 @@
           <a:bodyPr wrap="square" rtlCol="0" anchor="ctr"/>
           <a:lstStyle/>
           <a:p>
-            <a:pPr algn="ctr" indent="0" marL="0">
+            <a:pPr marL="0" indent="0" algn="ctr">
               <a:buNone/>
             </a:pPr>
             <a:r>
@@ -21143,7 +20851,7 @@
           <a:bodyPr wrap="square" rtlCol="0" anchor="t"/>
           <a:lstStyle/>
           <a:p>
-            <a:pPr indent="0" marL="0">
+            <a:pPr marL="0" indent="0">
               <a:buNone/>
             </a:pPr>
             <a:r>
@@ -21199,7 +20907,7 @@
           <a:bodyPr wrap="square" rtlCol="0" anchor="ctr"/>
           <a:lstStyle/>
           <a:p>
-            <a:pPr algn="ctr" indent="0" marL="0">
+            <a:pPr marL="0" indent="0" algn="ctr">
               <a:buNone/>
             </a:pPr>
             <a:r>
@@ -21235,7 +20943,7 @@
           <a:bodyPr wrap="square" rtlCol="0" anchor="t"/>
           <a:lstStyle/>
           <a:p>
-            <a:pPr indent="0" marL="0">
+            <a:pPr marL="0" indent="0">
               <a:buNone/>
             </a:pPr>
             <a:r>
@@ -21291,7 +20999,7 @@
           <a:bodyPr wrap="square" rtlCol="0" anchor="ctr"/>
           <a:lstStyle/>
           <a:p>
-            <a:pPr algn="ctr" indent="0" marL="0">
+            <a:pPr marL="0" indent="0" algn="ctr">
               <a:buNone/>
             </a:pPr>
             <a:r>
@@ -21327,7 +21035,7 @@
           <a:bodyPr wrap="square" rtlCol="0" anchor="t"/>
           <a:lstStyle/>
           <a:p>
-            <a:pPr indent="0" marL="0">
+            <a:pPr marL="0" indent="0">
               <a:buNone/>
             </a:pPr>
             <a:r>
@@ -21390,7 +21098,7 @@
           <a:bodyPr wrap="square" rtlCol="0" anchor="ctr"/>
           <a:lstStyle/>
           <a:p>
-            <a:pPr indent="0" marL="0">
+            <a:pPr marL="0" indent="0">
               <a:buNone/>
             </a:pPr>
             <a:r>
@@ -21426,7 +21134,7 @@
           <a:bodyPr wrap="square" rtlCol="0" anchor="ctr"/>
           <a:lstStyle/>
           <a:p>
-            <a:pPr indent="0" marL="0">
+            <a:pPr marL="0" indent="0">
               <a:buNone/>
             </a:pPr>
             <a:r>
@@ -21440,7 +21148,7 @@
             <a:endParaRPr lang="en-US" sz="1000" dirty="0"/>
           </a:p>
           <a:p>
-            <a:pPr indent="0" marL="0">
+            <a:pPr marL="0" indent="0">
               <a:buNone/>
             </a:pPr>
             <a:r>
@@ -21454,7 +21162,7 @@
             <a:endParaRPr lang="en-US" sz="1000" dirty="0"/>
           </a:p>
           <a:p>
-            <a:pPr indent="0" marL="0">
+            <a:pPr marL="0" indent="0">
               <a:buNone/>
             </a:pPr>
             <a:r>
@@ -21532,7 +21240,7 @@
           <a:bodyPr wrap="square" rtlCol="0" anchor="ctr"/>
           <a:lstStyle/>
           <a:p>
-            <a:pPr algn="ctr" indent="0" marL="0">
+            <a:pPr marL="0" indent="0" algn="ctr">
               <a:buNone/>
             </a:pPr>
             <a:r>
@@ -21568,7 +21276,7 @@
           <a:bodyPr wrap="square" rtlCol="0" anchor="ctr"/>
           <a:lstStyle/>
           <a:p>
-            <a:pPr indent="0" marL="0">
+            <a:pPr marL="0" indent="0">
               <a:buNone/>
             </a:pPr>
             <a:r>
@@ -21604,7 +21312,7 @@
           <a:bodyPr wrap="square" rtlCol="0" anchor="ctr"/>
           <a:lstStyle/>
           <a:p>
-            <a:pPr algn="r" indent="0" marL="0">
+            <a:pPr marL="0" indent="0" algn="r">
               <a:buNone/>
             </a:pPr>
             <a:r>
@@ -21685,11 +21393,11 @@
           <a:bodyPr wrap="square" rtlCol="0" anchor="ctr"/>
           <a:lstStyle/>
           <a:p>
-            <a:pPr indent="0" marL="0">
-              <a:buNone/>
-            </a:pPr>
-            <a:r>
-              <a:rPr lang="en-US" sz="800" b="1" spc="300" kern="0" dirty="0">
+            <a:pPr marL="0" indent="0">
+              <a:buNone/>
+            </a:pPr>
+            <a:r>
+              <a:rPr lang="en-US" sz="800" b="1" kern="0" spc="300" dirty="0">
                 <a:solidFill>
                   <a:srgbClr val="6B7280"/>
                 </a:solidFill>
@@ -21721,7 +21429,7 @@
           <a:bodyPr wrap="square" rtlCol="0" anchor="ctr"/>
           <a:lstStyle/>
           <a:p>
-            <a:pPr indent="0" marL="0">
+            <a:pPr marL="0" indent="0">
               <a:buNone/>
             </a:pPr>
             <a:r>
@@ -21760,7 +21468,7 @@
           <a:bodyPr wrap="square" rtlCol="0" anchor="ctr"/>
           <a:lstStyle/>
           <a:p>
-            <a:pPr indent="0" marL="0">
+            <a:pPr marL="0" indent="0">
               <a:buNone/>
             </a:pPr>
             <a:r>
@@ -21819,7 +21527,7 @@
           <a:bodyPr wrap="square" rtlCol="0" anchor="ctr"/>
           <a:lstStyle/>
           <a:p>
-            <a:pPr indent="0" marL="0">
+            <a:pPr marL="0" indent="0">
               <a:buNone/>
             </a:pPr>
             <a:r>
@@ -21875,7 +21583,7 @@
           <a:bodyPr wrap="square" rtlCol="0" anchor="ctr"/>
           <a:lstStyle/>
           <a:p>
-            <a:pPr algn="ctr" indent="0" marL="0">
+            <a:pPr marL="0" indent="0" algn="ctr">
               <a:buNone/>
             </a:pPr>
             <a:r>
@@ -21931,7 +21639,7 @@
           <a:bodyPr wrap="square" rtlCol="0" anchor="ctr"/>
           <a:lstStyle/>
           <a:p>
-            <a:pPr algn="ctr" indent="0" marL="0">
+            <a:pPr marL="0" indent="0" algn="ctr">
               <a:buNone/>
             </a:pPr>
             <a:r>
@@ -21987,7 +21695,7 @@
           <a:bodyPr wrap="square" rtlCol="0" anchor="ctr"/>
           <a:lstStyle/>
           <a:p>
-            <a:pPr algn="ctr" indent="0" marL="0">
+            <a:pPr marL="0" indent="0" algn="ctr">
               <a:buNone/>
             </a:pPr>
             <a:r>
@@ -22068,7 +21776,7 @@
           <a:bodyPr wrap="square" rtlCol="0" anchor="ctr"/>
           <a:lstStyle/>
           <a:p>
-            <a:pPr algn="ctr" indent="0" marL="0">
+            <a:pPr marL="0" indent="0" algn="ctr">
               <a:buNone/>
             </a:pPr>
             <a:r>
@@ -22104,7 +21812,7 @@
           <a:bodyPr wrap="square" rtlCol="0" anchor="ctr"/>
           <a:lstStyle/>
           <a:p>
-            <a:pPr indent="0" marL="0">
+            <a:pPr marL="0" indent="0">
               <a:buNone/>
             </a:pPr>
             <a:r>
@@ -22140,7 +21848,7 @@
           <a:bodyPr wrap="square" rtlCol="0" anchor="t"/>
           <a:lstStyle/>
           <a:p>
-            <a:pPr indent="0" marL="0">
+            <a:pPr marL="0" indent="0">
               <a:buNone/>
             </a:pPr>
             <a:r>
@@ -22221,7 +21929,7 @@
           <a:bodyPr wrap="square" rtlCol="0" anchor="ctr"/>
           <a:lstStyle/>
           <a:p>
-            <a:pPr algn="ctr" indent="0" marL="0">
+            <a:pPr marL="0" indent="0" algn="ctr">
               <a:buNone/>
             </a:pPr>
             <a:r>
@@ -22257,7 +21965,7 @@
           <a:bodyPr wrap="square" rtlCol="0" anchor="ctr"/>
           <a:lstStyle/>
           <a:p>
-            <a:pPr indent="0" marL="0">
+            <a:pPr marL="0" indent="0">
               <a:buNone/>
             </a:pPr>
             <a:r>
@@ -22293,7 +22001,7 @@
           <a:bodyPr wrap="square" rtlCol="0" anchor="t"/>
           <a:lstStyle/>
           <a:p>
-            <a:pPr indent="0" marL="0">
+            <a:pPr marL="0" indent="0">
               <a:buNone/>
             </a:pPr>
             <a:r>
@@ -22374,7 +22082,7 @@
           <a:bodyPr wrap="square" rtlCol="0" anchor="ctr"/>
           <a:lstStyle/>
           <a:p>
-            <a:pPr algn="ctr" indent="0" marL="0">
+            <a:pPr marL="0" indent="0" algn="ctr">
               <a:buNone/>
             </a:pPr>
             <a:r>
@@ -22410,7 +22118,7 @@
           <a:bodyPr wrap="square" rtlCol="0" anchor="ctr"/>
           <a:lstStyle/>
           <a:p>
-            <a:pPr indent="0" marL="0">
+            <a:pPr marL="0" indent="0">
               <a:buNone/>
             </a:pPr>
             <a:r>
@@ -22446,7 +22154,7 @@
           <a:bodyPr wrap="square" rtlCol="0" anchor="t"/>
           <a:lstStyle/>
           <a:p>
-            <a:pPr indent="0" marL="0">
+            <a:pPr marL="0" indent="0">
               <a:buNone/>
             </a:pPr>
             <a:r>
@@ -22509,7 +22217,7 @@
           <a:bodyPr wrap="square" rtlCol="0" anchor="ctr"/>
           <a:lstStyle/>
           <a:p>
-            <a:pPr indent="0" marL="0">
+            <a:pPr marL="0" indent="0">
               <a:buNone/>
             </a:pPr>
             <a:r>
@@ -22545,7 +22253,7 @@
           <a:bodyPr wrap="square" rtlCol="0" anchor="ctr"/>
           <a:lstStyle/>
           <a:p>
-            <a:pPr indent="0" marL="0">
+            <a:pPr marL="0" indent="0">
               <a:buNone/>
             </a:pPr>
             <a:r>
@@ -22623,7 +22331,7 @@
           <a:bodyPr wrap="square" rtlCol="0" anchor="ctr"/>
           <a:lstStyle/>
           <a:p>
-            <a:pPr algn="ctr" indent="0" marL="0">
+            <a:pPr marL="0" indent="0" algn="ctr">
               <a:buNone/>
             </a:pPr>
             <a:r>
@@ -22659,7 +22367,7 @@
           <a:bodyPr wrap="square" rtlCol="0" anchor="ctr"/>
           <a:lstStyle/>
           <a:p>
-            <a:pPr indent="0" marL="0">
+            <a:pPr marL="0" indent="0">
               <a:buNone/>
             </a:pPr>
             <a:r>
@@ -22695,7 +22403,7 @@
           <a:bodyPr wrap="square" rtlCol="0" anchor="ctr"/>
           <a:lstStyle/>
           <a:p>
-            <a:pPr algn="r" indent="0" marL="0">
+            <a:pPr marL="0" indent="0" algn="r">
               <a:buNone/>
             </a:pPr>
             <a:r>
@@ -22776,11 +22484,11 @@
           <a:bodyPr wrap="square" rtlCol="0" anchor="ctr"/>
           <a:lstStyle/>
           <a:p>
-            <a:pPr indent="0" marL="0">
-              <a:buNone/>
-            </a:pPr>
-            <a:r>
-              <a:rPr lang="en-US" sz="800" b="1" spc="300" kern="0" dirty="0">
+            <a:pPr marL="0" indent="0">
+              <a:buNone/>
+            </a:pPr>
+            <a:r>
+              <a:rPr lang="en-US" sz="800" b="1" kern="0" spc="300" dirty="0">
                 <a:solidFill>
                   <a:srgbClr val="6B7280"/>
                 </a:solidFill>
@@ -22812,7 +22520,7 @@
           <a:bodyPr wrap="square" rtlCol="0" anchor="ctr"/>
           <a:lstStyle/>
           <a:p>
-            <a:pPr indent="0" marL="0">
+            <a:pPr marL="0" indent="0">
               <a:buNone/>
             </a:pPr>
             <a:r>
@@ -22851,7 +22559,7 @@
           <a:bodyPr wrap="square" rtlCol="0" anchor="ctr"/>
           <a:lstStyle/>
           <a:p>
-            <a:pPr indent="0" marL="0">
+            <a:pPr marL="0" indent="0">
               <a:buNone/>
             </a:pPr>
             <a:r>
@@ -22937,7 +22645,7 @@
           <a:bodyPr wrap="square" rtlCol="0" anchor="ctr"/>
           <a:lstStyle/>
           <a:p>
-            <a:pPr algn="ctr" indent="0" marL="0">
+            <a:pPr marL="0" indent="0" algn="ctr">
               <a:buNone/>
             </a:pPr>
             <a:r>
@@ -22973,7 +22681,7 @@
           <a:bodyPr wrap="square" rtlCol="0" anchor="ctr"/>
           <a:lstStyle/>
           <a:p>
-            <a:pPr indent="0" marL="0">
+            <a:pPr marL="0" indent="0">
               <a:buNone/>
             </a:pPr>
             <a:r>
@@ -23009,7 +22717,7 @@
           <a:bodyPr wrap="square" rtlCol="0" anchor="ctr"/>
           <a:lstStyle/>
           <a:p>
-            <a:pPr indent="0" marL="0">
+            <a:pPr marL="0" indent="0">
               <a:buNone/>
             </a:pPr>
             <a:r>
@@ -23072,7 +22780,7 @@
           <a:bodyPr wrap="square" rtlCol="0" anchor="ctr"/>
           <a:lstStyle/>
           <a:p>
-            <a:pPr algn="ctr" indent="0" marL="0">
+            <a:pPr marL="0" indent="0" algn="ctr">
               <a:buNone/>
             </a:pPr>
             <a:r>
@@ -23108,7 +22816,7 @@
           <a:bodyPr wrap="square" rtlCol="0" anchor="ctr"/>
           <a:lstStyle/>
           <a:p>
-            <a:pPr indent="0" marL="0">
+            <a:pPr marL="0" indent="0">
               <a:buNone/>
             </a:pPr>
             <a:r>
@@ -23144,7 +22852,7 @@
           <a:bodyPr wrap="square" rtlCol="0" anchor="ctr"/>
           <a:lstStyle/>
           <a:p>
-            <a:pPr indent="0" marL="0">
+            <a:pPr marL="0" indent="0">
               <a:buNone/>
             </a:pPr>
             <a:r>
@@ -23207,7 +22915,7 @@
           <a:bodyPr wrap="square" rtlCol="0" anchor="ctr"/>
           <a:lstStyle/>
           <a:p>
-            <a:pPr algn="ctr" indent="0" marL="0">
+            <a:pPr marL="0" indent="0" algn="ctr">
               <a:buNone/>
             </a:pPr>
             <a:r>
@@ -23243,7 +22951,7 @@
           <a:bodyPr wrap="square" rtlCol="0" anchor="ctr"/>
           <a:lstStyle/>
           <a:p>
-            <a:pPr indent="0" marL="0">
+            <a:pPr marL="0" indent="0">
               <a:buNone/>
             </a:pPr>
             <a:r>
@@ -23279,7 +22987,7 @@
           <a:bodyPr wrap="square" rtlCol="0" anchor="ctr"/>
           <a:lstStyle/>
           <a:p>
-            <a:pPr indent="0" marL="0">
+            <a:pPr marL="0" indent="0">
               <a:buNone/>
             </a:pPr>
             <a:r>
@@ -23342,7 +23050,7 @@
           <a:bodyPr wrap="square" rtlCol="0" anchor="ctr"/>
           <a:lstStyle/>
           <a:p>
-            <a:pPr algn="ctr" indent="0" marL="0">
+            <a:pPr marL="0" indent="0" algn="ctr">
               <a:buNone/>
             </a:pPr>
             <a:r>
@@ -23378,7 +23086,7 @@
           <a:bodyPr wrap="square" rtlCol="0" anchor="ctr"/>
           <a:lstStyle/>
           <a:p>
-            <a:pPr indent="0" marL="0">
+            <a:pPr marL="0" indent="0">
               <a:buNone/>
             </a:pPr>
             <a:r>
@@ -23414,7 +23122,7 @@
           <a:bodyPr wrap="square" rtlCol="0" anchor="ctr"/>
           <a:lstStyle/>
           <a:p>
-            <a:pPr indent="0" marL="0">
+            <a:pPr marL="0" indent="0">
               <a:buNone/>
             </a:pPr>
             <a:r>
@@ -23477,7 +23185,7 @@
           <a:bodyPr wrap="square" rtlCol="0" anchor="ctr"/>
           <a:lstStyle/>
           <a:p>
-            <a:pPr algn="ctr" indent="0" marL="0">
+            <a:pPr marL="0" indent="0" algn="ctr">
               <a:buNone/>
             </a:pPr>
             <a:r>
@@ -23513,7 +23221,7 @@
           <a:bodyPr wrap="square" rtlCol="0" anchor="ctr"/>
           <a:lstStyle/>
           <a:p>
-            <a:pPr indent="0" marL="0">
+            <a:pPr marL="0" indent="0">
               <a:buNone/>
             </a:pPr>
             <a:r>
@@ -23549,7 +23257,7 @@
           <a:bodyPr wrap="square" rtlCol="0" anchor="ctr"/>
           <a:lstStyle/>
           <a:p>
-            <a:pPr indent="0" marL="0">
+            <a:pPr marL="0" indent="0">
               <a:buNone/>
             </a:pPr>
             <a:r>
@@ -23612,7 +23320,7 @@
           <a:bodyPr wrap="square" rtlCol="0" anchor="ctr"/>
           <a:lstStyle/>
           <a:p>
-            <a:pPr algn="ctr" indent="0" marL="0">
+            <a:pPr marL="0" indent="0" algn="ctr">
               <a:buNone/>
             </a:pPr>
             <a:r>
@@ -23648,7 +23356,7 @@
           <a:bodyPr wrap="square" rtlCol="0" anchor="ctr"/>
           <a:lstStyle/>
           <a:p>
-            <a:pPr indent="0" marL="0">
+            <a:pPr marL="0" indent="0">
               <a:buNone/>
             </a:pPr>
             <a:r>
@@ -23684,7 +23392,7 @@
           <a:bodyPr wrap="square" rtlCol="0" anchor="ctr"/>
           <a:lstStyle/>
           <a:p>
-            <a:pPr indent="0" marL="0">
+            <a:pPr marL="0" indent="0">
               <a:buNone/>
             </a:pPr>
             <a:r>
@@ -23747,7 +23455,7 @@
           <a:bodyPr wrap="square" rtlCol="0" anchor="ctr"/>
           <a:lstStyle/>
           <a:p>
-            <a:pPr algn="ctr" indent="0" marL="0">
+            <a:pPr marL="0" indent="0" algn="ctr">
               <a:buNone/>
             </a:pPr>
             <a:r>
@@ -23783,7 +23491,7 @@
           <a:bodyPr wrap="square" rtlCol="0" anchor="ctr"/>
           <a:lstStyle/>
           <a:p>
-            <a:pPr indent="0" marL="0">
+            <a:pPr marL="0" indent="0">
               <a:buNone/>
             </a:pPr>
             <a:r>
@@ -23819,7 +23527,7 @@
           <a:bodyPr wrap="square" rtlCol="0" anchor="ctr"/>
           <a:lstStyle/>
           <a:p>
-            <a:pPr indent="0" marL="0">
+            <a:pPr marL="0" indent="0">
               <a:buNone/>
             </a:pPr>
             <a:r>
@@ -23882,7 +23590,7 @@
           <a:bodyPr wrap="square" rtlCol="0" anchor="ctr"/>
           <a:lstStyle/>
           <a:p>
-            <a:pPr algn="ctr" indent="0" marL="0">
+            <a:pPr marL="0" indent="0" algn="ctr">
               <a:buNone/>
             </a:pPr>
             <a:r>
@@ -23918,7 +23626,7 @@
           <a:bodyPr wrap="square" rtlCol="0" anchor="ctr"/>
           <a:lstStyle/>
           <a:p>
-            <a:pPr indent="0" marL="0">
+            <a:pPr marL="0" indent="0">
               <a:buNone/>
             </a:pPr>
             <a:r>
@@ -23954,7 +23662,7 @@
           <a:bodyPr wrap="square" rtlCol="0" anchor="ctr"/>
           <a:lstStyle/>
           <a:p>
-            <a:pPr indent="0" marL="0">
+            <a:pPr marL="0" indent="0">
               <a:buNone/>
             </a:pPr>
             <a:r>
@@ -24017,7 +23725,7 @@
           <a:bodyPr wrap="square" rtlCol="0" anchor="ctr"/>
           <a:lstStyle/>
           <a:p>
-            <a:pPr indent="0" marL="0">
+            <a:pPr marL="0" indent="0">
               <a:buNone/>
             </a:pPr>
             <a:r>
@@ -24053,7 +23761,7 @@
           <a:bodyPr wrap="square" rtlCol="0" anchor="ctr"/>
           <a:lstStyle/>
           <a:p>
-            <a:pPr indent="0" marL="0">
+            <a:pPr marL="0" indent="0">
               <a:buNone/>
             </a:pPr>
             <a:r>
@@ -24131,7 +23839,7 @@
           <a:bodyPr wrap="square" rtlCol="0" anchor="ctr"/>
           <a:lstStyle/>
           <a:p>
-            <a:pPr algn="ctr" indent="0" marL="0">
+            <a:pPr marL="0" indent="0" algn="ctr">
               <a:buNone/>
             </a:pPr>
             <a:r>
@@ -24167,7 +23875,7 @@
           <a:bodyPr wrap="square" rtlCol="0" anchor="ctr"/>
           <a:lstStyle/>
           <a:p>
-            <a:pPr indent="0" marL="0">
+            <a:pPr marL="0" indent="0">
               <a:buNone/>
             </a:pPr>
             <a:r>
@@ -24203,7 +23911,7 @@
           <a:bodyPr wrap="square" rtlCol="0" anchor="ctr"/>
           <a:lstStyle/>
           <a:p>
-            <a:pPr algn="r" indent="0" marL="0">
+            <a:pPr marL="0" indent="0" algn="r">
               <a:buNone/>
             </a:pPr>
             <a:r>
@@ -24284,11 +23992,11 @@
           <a:bodyPr wrap="square" rtlCol="0" anchor="ctr"/>
           <a:lstStyle/>
           <a:p>
-            <a:pPr indent="0" marL="0">
-              <a:buNone/>
-            </a:pPr>
-            <a:r>
-              <a:rPr lang="en-US" sz="800" b="1" spc="300" kern="0" dirty="0">
+            <a:pPr marL="0" indent="0">
+              <a:buNone/>
+            </a:pPr>
+            <a:r>
+              <a:rPr lang="en-US" sz="800" b="1" kern="0" spc="300" dirty="0">
                 <a:solidFill>
                   <a:srgbClr val="6B7280"/>
                 </a:solidFill>
@@ -24320,7 +24028,7 @@
           <a:bodyPr wrap="square" rtlCol="0" anchor="ctr"/>
           <a:lstStyle/>
           <a:p>
-            <a:pPr indent="0" marL="0">
+            <a:pPr marL="0" indent="0">
               <a:buNone/>
             </a:pPr>
             <a:r>
@@ -24359,7 +24067,7 @@
           <a:bodyPr wrap="square" rtlCol="0" anchor="ctr"/>
           <a:lstStyle/>
           <a:p>
-            <a:pPr indent="0" marL="0">
+            <a:pPr marL="0" indent="0">
               <a:buNone/>
             </a:pPr>
             <a:r>
@@ -24465,7 +24173,7 @@
           <a:bodyPr wrap="square" rtlCol="0" anchor="ctr"/>
           <a:lstStyle/>
           <a:p>
-            <a:pPr algn="ctr" indent="0" marL="0">
+            <a:pPr marL="0" indent="0" algn="ctr">
               <a:buNone/>
             </a:pPr>
             <a:r>
@@ -24501,7 +24209,7 @@
           <a:bodyPr wrap="square" rtlCol="0" anchor="ctr"/>
           <a:lstStyle/>
           <a:p>
-            <a:pPr algn="ctr" indent="0" marL="0">
+            <a:pPr marL="0" indent="0" algn="ctr">
               <a:buNone/>
             </a:pPr>
             <a:r>
@@ -24537,7 +24245,7 @@
           <a:bodyPr wrap="square" rtlCol="0" anchor="ctr"/>
           <a:lstStyle/>
           <a:p>
-            <a:pPr algn="ctr" indent="0" marL="0">
+            <a:pPr marL="0" indent="0" algn="ctr">
               <a:buNone/>
             </a:pPr>
             <a:r>
@@ -24551,7 +24259,7 @@
             <a:endParaRPr lang="en-US" sz="1000" dirty="0"/>
           </a:p>
           <a:p>
-            <a:pPr algn="ctr" indent="0" marL="0">
+            <a:pPr marL="0" indent="0" algn="ctr">
               <a:buNone/>
             </a:pPr>
             <a:r>
@@ -24634,7 +24342,7 @@
           <a:bodyPr wrap="square" rtlCol="0" anchor="ctr"/>
           <a:lstStyle/>
           <a:p>
-            <a:pPr algn="ctr" indent="0" marL="0">
+            <a:pPr marL="0" indent="0" algn="ctr">
               <a:buNone/>
             </a:pPr>
             <a:r>
@@ -24670,7 +24378,7 @@
           <a:bodyPr wrap="square" rtlCol="0" anchor="ctr"/>
           <a:lstStyle/>
           <a:p>
-            <a:pPr algn="ctr" indent="0" marL="0">
+            <a:pPr marL="0" indent="0" algn="ctr">
               <a:buNone/>
             </a:pPr>
             <a:r>
@@ -24706,7 +24414,7 @@
           <a:bodyPr wrap="square" rtlCol="0" anchor="ctr"/>
           <a:lstStyle/>
           <a:p>
-            <a:pPr algn="ctr" indent="0" marL="0">
+            <a:pPr marL="0" indent="0" algn="ctr">
               <a:buNone/>
             </a:pPr>
             <a:r>
@@ -24720,7 +24428,7 @@
             <a:endParaRPr lang="en-US" sz="1000" dirty="0"/>
           </a:p>
           <a:p>
-            <a:pPr algn="ctr" indent="0" marL="0">
+            <a:pPr marL="0" indent="0" algn="ctr">
               <a:buNone/>
             </a:pPr>
             <a:r>
@@ -24803,7 +24511,7 @@
           <a:bodyPr wrap="square" rtlCol="0" anchor="ctr"/>
           <a:lstStyle/>
           <a:p>
-            <a:pPr algn="ctr" indent="0" marL="0">
+            <a:pPr marL="0" indent="0" algn="ctr">
               <a:buNone/>
             </a:pPr>
             <a:r>
@@ -24839,7 +24547,7 @@
           <a:bodyPr wrap="square" rtlCol="0" anchor="ctr"/>
           <a:lstStyle/>
           <a:p>
-            <a:pPr algn="ctr" indent="0" marL="0">
+            <a:pPr marL="0" indent="0" algn="ctr">
               <a:buNone/>
             </a:pPr>
             <a:r>
@@ -24875,7 +24583,7 @@
           <a:bodyPr wrap="square" rtlCol="0" anchor="ctr"/>
           <a:lstStyle/>
           <a:p>
-            <a:pPr algn="ctr" indent="0" marL="0">
+            <a:pPr marL="0" indent="0" algn="ctr">
               <a:buNone/>
             </a:pPr>
             <a:r>
@@ -24889,7 +24597,7 @@
             <a:endParaRPr lang="en-US" sz="1000" dirty="0"/>
           </a:p>
           <a:p>
-            <a:pPr algn="ctr" indent="0" marL="0">
+            <a:pPr marL="0" indent="0" algn="ctr">
               <a:buNone/>
             </a:pPr>
             <a:r>
@@ -24972,7 +24680,7 @@
           <a:bodyPr wrap="square" rtlCol="0" anchor="ctr"/>
           <a:lstStyle/>
           <a:p>
-            <a:pPr algn="ctr" indent="0" marL="0">
+            <a:pPr marL="0" indent="0" algn="ctr">
               <a:buNone/>
             </a:pPr>
             <a:r>
@@ -25008,7 +24716,7 @@
           <a:bodyPr wrap="square" rtlCol="0" anchor="ctr"/>
           <a:lstStyle/>
           <a:p>
-            <a:pPr algn="ctr" indent="0" marL="0">
+            <a:pPr marL="0" indent="0" algn="ctr">
               <a:buNone/>
             </a:pPr>
             <a:r>
@@ -25044,7 +24752,7 @@
           <a:bodyPr wrap="square" rtlCol="0" anchor="ctr"/>
           <a:lstStyle/>
           <a:p>
-            <a:pPr algn="ctr" indent="0" marL="0">
+            <a:pPr marL="0" indent="0" algn="ctr">
               <a:buNone/>
             </a:pPr>
             <a:r>
@@ -25058,7 +24766,7 @@
             <a:endParaRPr lang="en-US" sz="1000" dirty="0"/>
           </a:p>
           <a:p>
-            <a:pPr algn="ctr" indent="0" marL="0">
+            <a:pPr marL="0" indent="0" algn="ctr">
               <a:buNone/>
             </a:pPr>
             <a:r>
@@ -25121,7 +24829,7 @@
           <a:bodyPr wrap="square" rtlCol="0" anchor="ctr"/>
           <a:lstStyle/>
           <a:p>
-            <a:pPr indent="0" marL="0">
+            <a:pPr marL="0" indent="0">
               <a:buNone/>
             </a:pPr>
             <a:r>
@@ -25157,7 +24865,7 @@
           <a:bodyPr wrap="square" rtlCol="0" anchor="ctr"/>
           <a:lstStyle/>
           <a:p>
-            <a:pPr indent="0" marL="0">
+            <a:pPr marL="0" indent="0">
               <a:buNone/>
             </a:pPr>
             <a:r>
@@ -25171,7 +24879,7 @@
             <a:endParaRPr lang="en-US" sz="1000" dirty="0"/>
           </a:p>
           <a:p>
-            <a:pPr indent="0" marL="0">
+            <a:pPr marL="0" indent="0">
               <a:buNone/>
             </a:pPr>
             <a:r>
@@ -25185,7 +24893,7 @@
             <a:endParaRPr lang="en-US" sz="1000" dirty="0"/>
           </a:p>
           <a:p>
-            <a:pPr indent="0" marL="0">
+            <a:pPr marL="0" indent="0">
               <a:buNone/>
             </a:pPr>
             <a:r>
@@ -25199,7 +24907,7 @@
             <a:endParaRPr lang="en-US" sz="1000" dirty="0"/>
           </a:p>
           <a:p>
-            <a:pPr indent="0" marL="0">
+            <a:pPr marL="0" indent="0">
               <a:buNone/>
             </a:pPr>
             <a:r>
@@ -25277,7 +24985,7 @@
           <a:bodyPr wrap="square" rtlCol="0" anchor="ctr"/>
           <a:lstStyle/>
           <a:p>
-            <a:pPr algn="ctr" indent="0" marL="0">
+            <a:pPr marL="0" indent="0" algn="ctr">
               <a:buNone/>
             </a:pPr>
             <a:r>
@@ -25313,7 +25021,7 @@
           <a:bodyPr wrap="square" rtlCol="0" anchor="ctr"/>
           <a:lstStyle/>
           <a:p>
-            <a:pPr indent="0" marL="0">
+            <a:pPr marL="0" indent="0">
               <a:buNone/>
             </a:pPr>
             <a:r>
@@ -25349,7 +25057,7 @@
           <a:bodyPr wrap="square" rtlCol="0" anchor="ctr"/>
           <a:lstStyle/>
           <a:p>
-            <a:pPr algn="r" indent="0" marL="0">
+            <a:pPr marL="0" indent="0" algn="r">
               <a:buNone/>
             </a:pPr>
             <a:r>
@@ -25430,11 +25138,11 @@
           <a:bodyPr wrap="square" rtlCol="0" anchor="ctr"/>
           <a:lstStyle/>
           <a:p>
-            <a:pPr indent="0" marL="0">
-              <a:buNone/>
-            </a:pPr>
-            <a:r>
-              <a:rPr lang="en-US" sz="800" b="1" spc="300" kern="0" dirty="0">
+            <a:pPr marL="0" indent="0">
+              <a:buNone/>
+            </a:pPr>
+            <a:r>
+              <a:rPr lang="en-US" sz="800" b="1" kern="0" spc="300" dirty="0">
                 <a:solidFill>
                   <a:srgbClr val="6B7280"/>
                 </a:solidFill>
@@ -25466,7 +25174,7 @@
           <a:bodyPr wrap="square" rtlCol="0" anchor="ctr"/>
           <a:lstStyle/>
           <a:p>
-            <a:pPr indent="0" marL="0">
+            <a:pPr marL="0" indent="0">
               <a:buNone/>
             </a:pPr>
             <a:r>
@@ -25505,7 +25213,7 @@
           <a:bodyPr wrap="square" rtlCol="0" anchor="ctr"/>
           <a:lstStyle/>
           <a:p>
-            <a:pPr indent="0" marL="0">
+            <a:pPr marL="0" indent="0">
               <a:buNone/>
             </a:pPr>
             <a:r>
@@ -25606,7 +25314,7 @@
           <a:bodyPr wrap="square" rtlCol="0" anchor="ctr"/>
           <a:lstStyle/>
           <a:p>
-            <a:pPr algn="ctr" indent="0" marL="0">
+            <a:pPr marL="0" indent="0" algn="ctr">
               <a:buNone/>
             </a:pPr>
             <a:r>
@@ -25642,7 +25350,7 @@
           <a:bodyPr wrap="square" rtlCol="0" anchor="ctr"/>
           <a:lstStyle/>
           <a:p>
-            <a:pPr algn="ctr" indent="0" marL="0">
+            <a:pPr marL="0" indent="0" algn="ctr">
               <a:buNone/>
             </a:pPr>
             <a:r>
@@ -25678,7 +25386,7 @@
           <a:bodyPr wrap="square" rtlCol="0" anchor="ctr"/>
           <a:lstStyle/>
           <a:p>
-            <a:pPr algn="ctr" indent="0" marL="0">
+            <a:pPr marL="0" indent="0" algn="ctr">
               <a:buNone/>
             </a:pPr>
             <a:r>
@@ -25692,7 +25400,7 @@
             <a:endParaRPr lang="en-US" sz="900" dirty="0"/>
           </a:p>
           <a:p>
-            <a:pPr algn="ctr" indent="0" marL="0">
+            <a:pPr marL="0" indent="0" algn="ctr">
               <a:buNone/>
             </a:pPr>
             <a:r>
@@ -25770,7 +25478,7 @@
           <a:bodyPr wrap="square" rtlCol="0" anchor="ctr"/>
           <a:lstStyle/>
           <a:p>
-            <a:pPr algn="ctr" indent="0" marL="0">
+            <a:pPr marL="0" indent="0" algn="ctr">
               <a:buNone/>
             </a:pPr>
             <a:r>
@@ -25806,7 +25514,7 @@
           <a:bodyPr wrap="square" rtlCol="0" anchor="ctr"/>
           <a:lstStyle/>
           <a:p>
-            <a:pPr algn="ctr" indent="0" marL="0">
+            <a:pPr marL="0" indent="0" algn="ctr">
               <a:buNone/>
             </a:pPr>
             <a:r>
@@ -25842,7 +25550,7 @@
           <a:bodyPr wrap="square" rtlCol="0" anchor="ctr"/>
           <a:lstStyle/>
           <a:p>
-            <a:pPr algn="ctr" indent="0" marL="0">
+            <a:pPr marL="0" indent="0" algn="ctr">
               <a:buNone/>
             </a:pPr>
             <a:r>
@@ -25856,7 +25564,7 @@
             <a:endParaRPr lang="en-US" sz="900" dirty="0"/>
           </a:p>
           <a:p>
-            <a:pPr algn="ctr" indent="0" marL="0">
+            <a:pPr marL="0" indent="0" algn="ctr">
               <a:buNone/>
             </a:pPr>
             <a:r>
@@ -25934,7 +25642,7 @@
           <a:bodyPr wrap="square" rtlCol="0" anchor="ctr"/>
           <a:lstStyle/>
           <a:p>
-            <a:pPr algn="ctr" indent="0" marL="0">
+            <a:pPr marL="0" indent="0" algn="ctr">
               <a:buNone/>
             </a:pPr>
             <a:r>
@@ -25970,7 +25678,7 @@
           <a:bodyPr wrap="square" rtlCol="0" anchor="ctr"/>
           <a:lstStyle/>
           <a:p>
-            <a:pPr algn="ctr" indent="0" marL="0">
+            <a:pPr marL="0" indent="0" algn="ctr">
               <a:buNone/>
             </a:pPr>
             <a:r>
@@ -26006,7 +25714,7 @@
           <a:bodyPr wrap="square" rtlCol="0" anchor="ctr"/>
           <a:lstStyle/>
           <a:p>
-            <a:pPr algn="ctr" indent="0" marL="0">
+            <a:pPr marL="0" indent="0" algn="ctr">
               <a:buNone/>
             </a:pPr>
             <a:r>
@@ -26020,7 +25728,7 @@
             <a:endParaRPr lang="en-US" sz="900" dirty="0"/>
           </a:p>
           <a:p>
-            <a:pPr algn="ctr" indent="0" marL="0">
+            <a:pPr marL="0" indent="0" algn="ctr">
               <a:buNone/>
             </a:pPr>
             <a:r>
@@ -26098,7 +25806,7 @@
           <a:bodyPr wrap="square" rtlCol="0" anchor="ctr"/>
           <a:lstStyle/>
           <a:p>
-            <a:pPr algn="ctr" indent="0" marL="0">
+            <a:pPr marL="0" indent="0" algn="ctr">
               <a:buNone/>
             </a:pPr>
             <a:r>
@@ -26134,7 +25842,7 @@
           <a:bodyPr wrap="square" rtlCol="0" anchor="ctr"/>
           <a:lstStyle/>
           <a:p>
-            <a:pPr algn="ctr" indent="0" marL="0">
+            <a:pPr marL="0" indent="0" algn="ctr">
               <a:buNone/>
             </a:pPr>
             <a:r>
@@ -26170,7 +25878,7 @@
           <a:bodyPr wrap="square" rtlCol="0" anchor="ctr"/>
           <a:lstStyle/>
           <a:p>
-            <a:pPr algn="ctr" indent="0" marL="0">
+            <a:pPr marL="0" indent="0" algn="ctr">
               <a:buNone/>
             </a:pPr>
             <a:r>
@@ -26184,7 +25892,7 @@
             <a:endParaRPr lang="en-US" sz="900" dirty="0"/>
           </a:p>
           <a:p>
-            <a:pPr algn="ctr" indent="0" marL="0">
+            <a:pPr marL="0" indent="0" algn="ctr">
               <a:buNone/>
             </a:pPr>
             <a:r>
@@ -26262,7 +25970,7 @@
           <a:bodyPr wrap="square" rtlCol="0" anchor="ctr"/>
           <a:lstStyle/>
           <a:p>
-            <a:pPr algn="ctr" indent="0" marL="0">
+            <a:pPr marL="0" indent="0" algn="ctr">
               <a:buNone/>
             </a:pPr>
             <a:r>
@@ -26298,7 +26006,7 @@
           <a:bodyPr wrap="square" rtlCol="0" anchor="ctr"/>
           <a:lstStyle/>
           <a:p>
-            <a:pPr algn="ctr" indent="0" marL="0">
+            <a:pPr marL="0" indent="0" algn="ctr">
               <a:buNone/>
             </a:pPr>
             <a:r>
@@ -26334,7 +26042,7 @@
           <a:bodyPr wrap="square" rtlCol="0" anchor="ctr"/>
           <a:lstStyle/>
           <a:p>
-            <a:pPr algn="ctr" indent="0" marL="0">
+            <a:pPr marL="0" indent="0" algn="ctr">
               <a:buNone/>
             </a:pPr>
             <a:r>
@@ -26348,7 +26056,7 @@
             <a:endParaRPr lang="en-US" sz="900" dirty="0"/>
           </a:p>
           <a:p>
-            <a:pPr algn="ctr" indent="0" marL="0">
+            <a:pPr marL="0" indent="0" algn="ctr">
               <a:buNone/>
             </a:pPr>
             <a:r>
@@ -26411,7 +26119,7 @@
           <a:bodyPr wrap="square" rtlCol="0" anchor="ctr"/>
           <a:lstStyle/>
           <a:p>
-            <a:pPr indent="0" marL="0">
+            <a:pPr marL="0" indent="0">
               <a:buNone/>
             </a:pPr>
             <a:r>
@@ -26447,7 +26155,7 @@
           <a:bodyPr wrap="square" rtlCol="0" anchor="ctr"/>
           <a:lstStyle/>
           <a:p>
-            <a:pPr indent="0" marL="0">
+            <a:pPr marL="0" indent="0">
               <a:buNone/>
             </a:pPr>
             <a:r>
@@ -26525,7 +26233,7 @@
           <a:bodyPr wrap="square" rtlCol="0" anchor="ctr"/>
           <a:lstStyle/>
           <a:p>
-            <a:pPr algn="ctr" indent="0" marL="0">
+            <a:pPr marL="0" indent="0" algn="ctr">
               <a:buNone/>
             </a:pPr>
             <a:r>
@@ -26561,7 +26269,7 @@
           <a:bodyPr wrap="square" rtlCol="0" anchor="ctr"/>
           <a:lstStyle/>
           <a:p>
-            <a:pPr indent="0" marL="0">
+            <a:pPr marL="0" indent="0">
               <a:buNone/>
             </a:pPr>
             <a:r>
@@ -26597,7 +26305,7 @@
           <a:bodyPr wrap="square" rtlCol="0" anchor="ctr"/>
           <a:lstStyle/>
           <a:p>
-            <a:pPr algn="r" indent="0" marL="0">
+            <a:pPr marL="0" indent="0" algn="r">
               <a:buNone/>
             </a:pPr>
             <a:r>
@@ -26933,4 +26641,299 @@
     </a:ext>
   </a:extLst>
 </a:theme>
+</file>
+
+<file path=ppt/theme/theme2.xml><?xml version="1.0" encoding="utf-8"?>
+<a:theme xmlns:a="http://schemas.openxmlformats.org/drawingml/2006/main" name="Office Theme">
+  <a:themeElements>
+    <a:clrScheme name="Office">
+      <a:dk1>
+        <a:sysClr val="windowText" lastClr="000000"/>
+      </a:dk1>
+      <a:lt1>
+        <a:sysClr val="window" lastClr="FFFFFF"/>
+      </a:lt1>
+      <a:dk2>
+        <a:srgbClr val="44546A"/>
+      </a:dk2>
+      <a:lt2>
+        <a:srgbClr val="E7E6E6"/>
+      </a:lt2>
+      <a:accent1>
+        <a:srgbClr val="4472C4"/>
+      </a:accent1>
+      <a:accent2>
+        <a:srgbClr val="ED7D31"/>
+      </a:accent2>
+      <a:accent3>
+        <a:srgbClr val="A5A5A5"/>
+      </a:accent3>
+      <a:accent4>
+        <a:srgbClr val="FFC000"/>
+      </a:accent4>
+      <a:accent5>
+        <a:srgbClr val="5B9BD5"/>
+      </a:accent5>
+      <a:accent6>
+        <a:srgbClr val="70AD47"/>
+      </a:accent6>
+      <a:hlink>
+        <a:srgbClr val="0563C1"/>
+      </a:hlink>
+      <a:folHlink>
+        <a:srgbClr val="954F72"/>
+      </a:folHlink>
+    </a:clrScheme>
+    <a:fontScheme name="Office">
+      <a:majorFont>
+        <a:latin typeface="Calibri Light" panose="020F0302020204030204"/>
+        <a:ea typeface=""/>
+        <a:cs typeface=""/>
+        <a:font script="Jpan" typeface="游ゴシック Light"/>
+        <a:font script="Hang" typeface="맑은 고딕"/>
+        <a:font script="Hans" typeface="等线 Light"/>
+        <a:font script="Hant" typeface="新細明體"/>
+        <a:font script="Arab" typeface="Times New Roman"/>
+        <a:font script="Hebr" typeface="Times New Roman"/>
+        <a:font script="Thai" typeface="Angsana New"/>
+        <a:font script="Ethi" typeface="Nyala"/>
+        <a:font script="Beng" typeface="Vrinda"/>
+        <a:font script="Gujr" typeface="Shruti"/>
+        <a:font script="Khmr" typeface="MoolBoran"/>
+        <a:font script="Knda" typeface="Tunga"/>
+        <a:font script="Guru" typeface="Raavi"/>
+        <a:font script="Cans" typeface="Euphemia"/>
+        <a:font script="Cher" typeface="Plantagenet Cherokee"/>
+        <a:font script="Yiii" typeface="Microsoft Yi Baiti"/>
+        <a:font script="Tibt" typeface="Microsoft Himalaya"/>
+        <a:font script="Thaa" typeface="MV Boli"/>
+        <a:font script="Deva" typeface="Mangal"/>
+        <a:font script="Telu" typeface="Gautami"/>
+        <a:font script="Taml" typeface="Latha"/>
+        <a:font script="Syrc" typeface="Estrangelo Edessa"/>
+        <a:font script="Orya" typeface="Kalinga"/>
+        <a:font script="Mlym" typeface="Kartika"/>
+        <a:font script="Laoo" typeface="DokChampa"/>
+        <a:font script="Sinh" typeface="Iskoola Pota"/>
+        <a:font script="Mong" typeface="Mongolian Baiti"/>
+        <a:font script="Viet" typeface="Times New Roman"/>
+        <a:font script="Uigh" typeface="Microsoft Uighur"/>
+        <a:font script="Geor" typeface="Sylfaen"/>
+        <a:font script="Armn" typeface="Arial"/>
+        <a:font script="Bugi" typeface="Leelawadee UI"/>
+        <a:font script="Bopo" typeface="Microsoft JhengHei"/>
+        <a:font script="Java" typeface="Javanese Text"/>
+        <a:font script="Lisu" typeface="Segoe UI"/>
+        <a:font script="Mymr" typeface="Myanmar Text"/>
+        <a:font script="Nkoo" typeface="Ebrima"/>
+        <a:font script="Olck" typeface="Nirmala UI"/>
+        <a:font script="Osma" typeface="Ebrima"/>
+        <a:font script="Phag" typeface="Phagspa"/>
+        <a:font script="Syrn" typeface="Estrangelo Edessa"/>
+        <a:font script="Syrj" typeface="Estrangelo Edessa"/>
+        <a:font script="Syre" typeface="Estrangelo Edessa"/>
+        <a:font script="Sora" typeface="Nirmala UI"/>
+        <a:font script="Tale" typeface="Microsoft Tai Le"/>
+        <a:font script="Talu" typeface="Microsoft New Tai Lue"/>
+        <a:font script="Tfng" typeface="Ebrima"/>
+      </a:majorFont>
+      <a:minorFont>
+        <a:latin typeface="Calibri" panose="020F0502020204030204"/>
+        <a:ea typeface=""/>
+        <a:cs typeface=""/>
+        <a:font script="Jpan" typeface="游ゴシック"/>
+        <a:font script="Hang" typeface="맑은 고딕"/>
+        <a:font script="Hans" typeface="等线"/>
+        <a:font script="Hant" typeface="新細明體"/>
+        <a:font script="Arab" typeface="Arial"/>
+        <a:font script="Hebr" typeface="Arial"/>
+        <a:font script="Thai" typeface="Cordia New"/>
+        <a:font script="Ethi" typeface="Nyala"/>
+        <a:font script="Beng" typeface="Vrinda"/>
+        <a:font script="Gujr" typeface="Shruti"/>
+        <a:font script="Khmr" typeface="DaunPenh"/>
+        <a:font script="Knda" typeface="Tunga"/>
+        <a:font script="Guru" typeface="Raavi"/>
+        <a:font script="Cans" typeface="Euphemia"/>
+        <a:font script="Cher" typeface="Plantagenet Cherokee"/>
+        <a:font script="Yiii" typeface="Microsoft Yi Baiti"/>
+        <a:font script="Tibt" typeface="Microsoft Himalaya"/>
+        <a:font script="Thaa" typeface="MV Boli"/>
+        <a:font script="Deva" typeface="Mangal"/>
+        <a:font script="Telu" typeface="Gautami"/>
+        <a:font script="Taml" typeface="Latha"/>
+        <a:font script="Syrc" typeface="Estrangelo Edessa"/>
+        <a:font script="Orya" typeface="Kalinga"/>
+        <a:font script="Mlym" typeface="Kartika"/>
+        <a:font script="Laoo" typeface="DokChampa"/>
+        <a:font script="Sinh" typeface="Iskoola Pota"/>
+        <a:font script="Mong" typeface="Mongolian Baiti"/>
+        <a:font script="Viet" typeface="Arial"/>
+        <a:font script="Uigh" typeface="Microsoft Uighur"/>
+        <a:font script="Geor" typeface="Sylfaen"/>
+        <a:font script="Armn" typeface="Arial"/>
+        <a:font script="Bugi" typeface="Leelawadee UI"/>
+        <a:font script="Bopo" typeface="Microsoft JhengHei"/>
+        <a:font script="Java" typeface="Javanese Text"/>
+        <a:font script="Lisu" typeface="Segoe UI"/>
+        <a:font script="Mymr" typeface="Myanmar Text"/>
+        <a:font script="Nkoo" typeface="Ebrima"/>
+        <a:font script="Olck" typeface="Nirmala UI"/>
+        <a:font script="Osma" typeface="Ebrima"/>
+        <a:font script="Phag" typeface="Phagspa"/>
+        <a:font script="Syrn" typeface="Estrangelo Edessa"/>
+        <a:font script="Syrj" typeface="Estrangelo Edessa"/>
+        <a:font script="Syre" typeface="Estrangelo Edessa"/>
+        <a:font script="Sora" typeface="Nirmala UI"/>
+        <a:font script="Tale" typeface="Microsoft Tai Le"/>
+        <a:font script="Talu" typeface="Microsoft New Tai Lue"/>
+        <a:font script="Tfng" typeface="Ebrima"/>
+      </a:minorFont>
+    </a:fontScheme>
+    <a:fmtScheme name="Office">
+      <a:fillStyleLst>
+        <a:solidFill>
+          <a:schemeClr val="phClr"/>
+        </a:solidFill>
+        <a:gradFill rotWithShape="1">
+          <a:gsLst>
+            <a:gs pos="0">
+              <a:schemeClr val="phClr">
+                <a:lumMod val="110000"/>
+                <a:satMod val="105000"/>
+                <a:tint val="67000"/>
+              </a:schemeClr>
+            </a:gs>
+            <a:gs pos="50000">
+              <a:schemeClr val="phClr">
+                <a:lumMod val="105000"/>
+                <a:satMod val="103000"/>
+                <a:tint val="73000"/>
+              </a:schemeClr>
+            </a:gs>
+            <a:gs pos="100000">
+              <a:schemeClr val="phClr">
+                <a:lumMod val="105000"/>
+                <a:satMod val="109000"/>
+                <a:tint val="81000"/>
+              </a:schemeClr>
+            </a:gs>
+          </a:gsLst>
+          <a:lin ang="5400000" scaled="0"/>
+        </a:gradFill>
+        <a:gradFill rotWithShape="1">
+          <a:gsLst>
+            <a:gs pos="0">
+              <a:schemeClr val="phClr">
+                <a:satMod val="103000"/>
+                <a:lumMod val="102000"/>
+                <a:tint val="94000"/>
+              </a:schemeClr>
+            </a:gs>
+            <a:gs pos="50000">
+              <a:schemeClr val="phClr">
+                <a:satMod val="110000"/>
+                <a:lumMod val="100000"/>
+                <a:shade val="100000"/>
+              </a:schemeClr>
+            </a:gs>
+            <a:gs pos="100000">
+              <a:schemeClr val="phClr">
+                <a:lumMod val="99000"/>
+                <a:satMod val="120000"/>
+                <a:shade val="78000"/>
+              </a:schemeClr>
+            </a:gs>
+          </a:gsLst>
+          <a:lin ang="5400000" scaled="0"/>
+        </a:gradFill>
+      </a:fillStyleLst>
+      <a:lnStyleLst>
+        <a:ln w="6350" cap="flat" cmpd="sng" algn="ctr">
+          <a:solidFill>
+            <a:schemeClr val="phClr"/>
+          </a:solidFill>
+          <a:prstDash val="solid"/>
+          <a:miter lim="800000"/>
+        </a:ln>
+        <a:ln w="12700" cap="flat" cmpd="sng" algn="ctr">
+          <a:solidFill>
+            <a:schemeClr val="phClr"/>
+          </a:solidFill>
+          <a:prstDash val="solid"/>
+          <a:miter lim="800000"/>
+        </a:ln>
+        <a:ln w="19050" cap="flat" cmpd="sng" algn="ctr">
+          <a:solidFill>
+            <a:schemeClr val="phClr"/>
+          </a:solidFill>
+          <a:prstDash val="solid"/>
+          <a:miter lim="800000"/>
+        </a:ln>
+      </a:lnStyleLst>
+      <a:effectStyleLst>
+        <a:effectStyle>
+          <a:effectLst/>
+        </a:effectStyle>
+        <a:effectStyle>
+          <a:effectLst/>
+        </a:effectStyle>
+        <a:effectStyle>
+          <a:effectLst>
+            <a:outerShdw blurRad="57150" dist="19050" dir="5400000" algn="ctr" rotWithShape="0">
+              <a:srgbClr val="000000">
+                <a:alpha val="63000"/>
+              </a:srgbClr>
+            </a:outerShdw>
+          </a:effectLst>
+        </a:effectStyle>
+      </a:effectStyleLst>
+      <a:bgFillStyleLst>
+        <a:solidFill>
+          <a:schemeClr val="phClr"/>
+        </a:solidFill>
+        <a:solidFill>
+          <a:schemeClr val="phClr">
+            <a:tint val="95000"/>
+            <a:satMod val="170000"/>
+          </a:schemeClr>
+        </a:solidFill>
+        <a:gradFill rotWithShape="1">
+          <a:gsLst>
+            <a:gs pos="0">
+              <a:schemeClr val="phClr">
+                <a:tint val="93000"/>
+                <a:satMod val="150000"/>
+                <a:shade val="98000"/>
+                <a:lumMod val="102000"/>
+              </a:schemeClr>
+            </a:gs>
+            <a:gs pos="50000">
+              <a:schemeClr val="phClr">
+                <a:tint val="98000"/>
+                <a:satMod val="130000"/>
+                <a:shade val="90000"/>
+                <a:lumMod val="103000"/>
+              </a:schemeClr>
+            </a:gs>
+            <a:gs pos="100000">
+              <a:schemeClr val="phClr">
+                <a:shade val="63000"/>
+                <a:satMod val="120000"/>
+              </a:schemeClr>
+            </a:gs>
+          </a:gsLst>
+          <a:lin ang="5400000" scaled="0"/>
+        </a:gradFill>
+      </a:bgFillStyleLst>
+    </a:fmtScheme>
+  </a:themeElements>
+  <a:objectDefaults/>
+  <a:extraClrSchemeLst/>
+  <a:extLst>
+    <a:ext uri="{05A4C25C-085E-4340-85A3-A5531E510DB2}">
+      <thm15:themeFamily xmlns:thm15="http://schemas.microsoft.com/office/thememl/2012/main" name="Office Theme" id="{62F939B6-93AF-4DB8-9C6B-D6C7DFDC589F}" vid="{4A3C46E8-61CC-4603-A589-7422A47A8E4A}"/>
+    </a:ext>
+  </a:extLst>
+</a:theme>
 </file>